--- a/write_up/Project Final Defense Slides_HANDBOOK_15.pptx
+++ b/write_up/Project Final Defense Slides_HANDBOOK_15.pptx
@@ -14,7 +14,7 @@
     <p:sldId id="555" r:id="rId5"/>
     <p:sldId id="558" r:id="rId6"/>
     <p:sldId id="582" r:id="rId8"/>
-    <p:sldId id="561" r:id="rId10"/>
+    <p:sldId id="562" r:id="rId9"/>
     <p:sldId id="583" r:id="rId11"/>
     <p:sldId id="585" r:id="rId13"/>
     <p:sldId id="592" r:id="rId14"/>
@@ -1740,8 +1740,8 @@
         </p:nvSpPr>
         <p:spPr>
           <a:xfrm>
-            <a:off x="5921829" y="1"/>
-            <a:ext cx="6270171" cy="6857999"/>
+            <a:off x="5897880" y="365760"/>
+            <a:ext cx="5852160" cy="6126480"/>
           </a:xfrm>
           <a:prstGeom prst="rect">
             <a:avLst/>
@@ -1767,59 +1767,95 @@
           </a:fontRef>
         </p:style>
         <p:txBody>
-          <a:bodyPr rtlCol="0" anchor="ctr"/>
+          <a:bodyPr rtlCol="0" anchor="ctr" wrap="square" tIns="91440" bIns="91440" lIns="182880" rIns="182880"/>
           <a:lstStyle/>
           <a:p>
             <a:pPr algn="ctr">
               <a:lnSpc>
                 <a:spcPct val="150000"/>
               </a:lnSpc>
-              <a:defRPr sz="1400" b="1"/>
+              <a:spcAft>
+                <a:spcPts val="100"/>
+              </a:spcAft>
+              <a:defRPr sz="1200" b="1" i="0"/>
             </a:pPr>
             <a:r>
               <a:t>FACULTY OF ENGINEERING</a:t>
             </a:r>
-            <a:br/>
+          </a:p>
+          <a:p>
+            <a:pPr>
+              <a:spcAft>
+                <a:spcPts val="1000"/>
+              </a:spcAft>
+              <a:defRPr sz="1200" b="1" i="0"/>
+            </a:pPr>
             <a:r>
               <a:t>DEPARTMENT OF COMPUTER ENGINEERING</a:t>
             </a:r>
           </a:p>
           <a:p>
-            <a:br/>
             <a:pPr>
-              <a:defRPr sz="1800" b="1"/>
+              <a:spcAft>
+                <a:spcPts val="1000"/>
+              </a:spcAft>
+              <a:defRPr sz="1400" b="1" i="0"/>
             </a:pPr>
             <a:r>
               <a:t>DEVELOPMENT AND IMPLEMENTATION OF A ROBOTIC APPLICATION FOR HUMAN INTENTION RECOGNITION USING MOTION AND HAND GESTURE</a:t>
             </a:r>
           </a:p>
           <a:p>
-            <a:br/>
             <a:pPr>
-              <a:defRPr sz="1200" i="1"/>
+              <a:spcAft>
+                <a:spcPts val="1400"/>
+              </a:spcAft>
+              <a:defRPr sz="1050" b="0" i="1"/>
             </a:pPr>
             <a:r>
               <a:t>A Final Project Report Submitted in Partial Fulfillment of the Requirements for the Degree of BSc. Computer Engineering</a:t>
             </a:r>
           </a:p>
           <a:p>
-            <a:br/>
             <a:pPr>
-              <a:defRPr sz="1200" b="1"/>
+              <a:spcAft>
+                <a:spcPts val="100"/>
+              </a:spcAft>
+              <a:defRPr sz="1100" b="1" i="0"/>
             </a:pPr>
             <a:r>
               <a:t>PRESENTED BY:</a:t>
             </a:r>
-            <a:br/>
+          </a:p>
+          <a:p>
+            <a:pPr>
+              <a:spcAft>
+                <a:spcPts val="100"/>
+              </a:spcAft>
+              <a:defRPr sz="1100" b="0" i="0"/>
+            </a:pPr>
             <a:r>
               <a:t>ELEANA OSEI OWUSU — 4121230024</a:t>
             </a:r>
-            <a:br/>
+          </a:p>
+          <a:p>
+            <a:pPr>
+              <a:spcAft>
+                <a:spcPts val="1000"/>
+              </a:spcAft>
+              <a:defRPr sz="1100" b="0" i="0"/>
+            </a:pPr>
             <a:r>
               <a:t>JOEL NII ADJETEY AHULU — 4121230020</a:t>
             </a:r>
-            <a:br/>
-            <a:br/>
+          </a:p>
+          <a:p>
+            <a:pPr>
+              <a:spcAft>
+                <a:spcPts val="0"/>
+              </a:spcAft>
+              <a:defRPr sz="1100" b="1" i="0"/>
+            </a:pPr>
             <a:r>
               <a:t>SUPERVISOR: MR. MICHEAL XENYA</a:t>
             </a:r>
@@ -2167,13 +2203,25 @@
           </a:bodyPr>
           <a:lstStyle/>
           <a:p>
+            <a:pPr>
+              <a:spcAft>
+                <a:spcPts val="100"/>
+              </a:spcAft>
+              <a:defRPr sz="950" b="1" i="0"/>
+            </a:pPr>
             <a:r>
               <a:t>Figure 5: Raspberry Pi 5 (8GB RAM)</a:t>
             </a:r>
           </a:p>
           <a:p>
-            <a:r>
-              <a:t>Main edge SBC processing YOLOv8, MediaPipe, 19-D MLP, and SLAM/Nav2 directly onboard at 28.4 FPS.</a:t>
+            <a:pPr>
+              <a:spcAft>
+                <a:spcPts val="0"/>
+              </a:spcAft>
+              <a:defRPr sz="850" b="0" i="0"/>
+            </a:pPr>
+            <a:r>
+              <a:t>Edge SBC running ROS 2 Humble, MediaPipe, 19-D MLP, and SLAM/Nav2 directly onboard at 28.4 FPS on CPU.</a:t>
             </a:r>
           </a:p>
         </p:txBody>
@@ -2200,11 +2248,23 @@
           </a:bodyPr>
           <a:lstStyle/>
           <a:p>
+            <a:pPr>
+              <a:spcAft>
+                <a:spcPts val="100"/>
+              </a:spcAft>
+              <a:defRPr sz="950" b="1" i="0"/>
+            </a:pPr>
             <a:r>
               <a:t>Figure 6: USB Monocular Camera</a:t>
             </a:r>
           </a:p>
           <a:p>
+            <a:pPr>
+              <a:spcAft>
+                <a:spcPts val="0"/>
+              </a:spcAft>
+              <a:defRPr sz="850" b="0" i="0"/>
+            </a:pPr>
             <a:r>
               <a:t>Captures 640x480 RGB frames at 30 FPS for gesture classification and active gimbal tracking.</a:t>
             </a:r>
@@ -2233,13 +2293,25 @@
           </a:bodyPr>
           <a:lstStyle/>
           <a:p>
+            <a:pPr>
+              <a:spcAft>
+                <a:spcPts val="100"/>
+              </a:spcAft>
+              <a:defRPr sz="950" b="1" i="0"/>
+            </a:pPr>
             <a:r>
               <a:t>Figure 7: MS200 2D Planar LiDAR</a:t>
             </a:r>
           </a:p>
           <a:p>
-            <a:r>
-              <a:t>Provides 360° laser scans at 10 Hz up to 12m for SLAM Toolbox and triggers the 0.36m ISO 15066 safety halt.</a:t>
+            <a:pPr>
+              <a:spcAft>
+                <a:spcPts val="0"/>
+              </a:spcAft>
+              <a:defRPr sz="850" b="0" i="0"/>
+            </a:pPr>
+            <a:r>
+              <a:t>Provides 360° laser scans at 10 Hz up to 12m for SLAM and triggers the 0.36m ISO 15066 safety halt.</a:t>
             </a:r>
           </a:p>
         </p:txBody>
@@ -2937,8 +3009,11 @@
           </a:bodyPr>
           <a:lstStyle/>
           <a:p>
-            <a:r>
-              <a:t>Figure 13: LSTM Path Predictor Training Loss &amp; Validation Convergence (ADE: 25.8 px, FDE: 32.4 px)</a:t>
+            <a:pPr>
+              <a:defRPr sz="950"/>
+            </a:pPr>
+            <a:r>
+              <a:t>Figure 13: LSTM Path Predictor Training Loss &amp; Convergence (ADE: 25.8 px, FDE: 32.4 px)</a:t>
             </a:r>
           </a:p>
         </p:txBody>
@@ -3357,6 +3432,9 @@
           </a:bodyPr>
           <a:lstStyle/>
           <a:p>
+            <a:pPr>
+              <a:defRPr sz="950"/>
+            </a:pPr>
             <a:r>
               <a:t>Figure 14: Initial SLAM Run — Hourglass Rotational Drift Defect (Unsynchronized IMU Yaw)</a:t>
             </a:r>
@@ -3451,6 +3529,9 @@
           </a:bodyPr>
           <a:lstStyle/>
           <a:p>
+            <a:pPr>
+              <a:defRPr sz="950"/>
+            </a:pPr>
             <a:r>
               <a:t>Figure 15: Final SLAM Run — Clean 5cm Metric Occupancy Grid Map (EKF Restamping Fix)</a:t>
             </a:r>
@@ -3598,6 +3679,9 @@
                     <a:bodyPr/>
                     <a:lstStyle/>
                     <a:p>
+                      <a:pPr>
+                        <a:defRPr sz="900"/>
+                      </a:pPr>
                       <a:r>
                         <a:rPr lang="en-GB" dirty="0"/>
                         <a:t>Gesture</a:t>
@@ -3611,6 +3695,9 @@
                     <a:bodyPr/>
                     <a:lstStyle/>
                     <a:p>
+                      <a:pPr>
+                        <a:defRPr sz="900"/>
+                      </a:pPr>
                       <a:r>
                         <a:rPr lang="en-GB" dirty="0"/>
                         <a:t>Total Trials </a:t>
@@ -3624,6 +3711,9 @@
                     <a:bodyPr/>
                     <a:lstStyle/>
                     <a:p>
+                      <a:pPr>
+                        <a:defRPr sz="900"/>
+                      </a:pPr>
                       <a:r>
                         <a:rPr lang="en-GB" sz="1600" dirty="0"/>
                         <a:t>Successful Trials </a:t>
@@ -3637,6 +3727,9 @@
                     <a:bodyPr/>
                     <a:lstStyle/>
                     <a:p>
+                      <a:pPr>
+                        <a:defRPr sz="900"/>
+                      </a:pPr>
                       <a:r>
                         <a:rPr lang="en-GB" dirty="0"/>
                         <a:t>Observed Accuracy (%)</a:t>
@@ -3657,6 +3750,9 @@
                     <a:bodyPr/>
                     <a:lstStyle/>
                     <a:p>
+                      <a:pPr>
+                        <a:defRPr sz="900"/>
+                      </a:pPr>
                       <a:r>
                         <a:rPr lang="en-GB" dirty="0"/>
                         <a:t>Stop</a:t>
@@ -3670,6 +3766,9 @@
                     <a:bodyPr/>
                     <a:lstStyle/>
                     <a:p>
+                      <a:pPr>
+                        <a:defRPr sz="900"/>
+                      </a:pPr>
                       <a:r>
                         <a:rPr lang="en-GB" dirty="0"/>
                         <a:t>30</a:t>
@@ -3683,6 +3782,9 @@
                     <a:bodyPr/>
                     <a:lstStyle/>
                     <a:p>
+                      <a:pPr>
+                        <a:defRPr sz="900"/>
+                      </a:pPr>
                       <a:r>
                         <a:rPr lang="en-GB" dirty="0"/>
                         <a:t>27</a:t>
@@ -3696,6 +3798,9 @@
                     <a:bodyPr/>
                     <a:lstStyle/>
                     <a:p>
+                      <a:pPr>
+                        <a:defRPr sz="900"/>
+                      </a:pPr>
                       <a:r>
                         <a:rPr lang="en-GB" dirty="0"/>
                         <a:t>90.0%</a:t>
@@ -3716,6 +3821,9 @@
                     <a:bodyPr/>
                     <a:lstStyle/>
                     <a:p>
+                      <a:pPr>
+                        <a:defRPr sz="900"/>
+                      </a:pPr>
                       <a:r>
                         <a:rPr lang="en-GB" dirty="0"/>
                         <a:t>Go</a:t>
@@ -3729,6 +3837,9 @@
                     <a:bodyPr/>
                     <a:lstStyle/>
                     <a:p>
+                      <a:pPr>
+                        <a:defRPr sz="900"/>
+                      </a:pPr>
                       <a:r>
                         <a:rPr lang="en-GB" dirty="0"/>
                         <a:t>30</a:t>
@@ -3742,6 +3853,9 @@
                     <a:bodyPr/>
                     <a:lstStyle/>
                     <a:p>
+                      <a:pPr>
+                        <a:defRPr sz="900"/>
+                      </a:pPr>
                       <a:r>
                         <a:rPr lang="en-GB" dirty="0"/>
                         <a:t>29</a:t>
@@ -3755,6 +3869,9 @@
                     <a:bodyPr/>
                     <a:lstStyle/>
                     <a:p>
+                      <a:pPr>
+                        <a:defRPr sz="900"/>
+                      </a:pPr>
                       <a:r>
                         <a:rPr lang="en-GB" dirty="0"/>
                         <a:t>96.7%</a:t>
@@ -3775,6 +3892,9 @@
                     <a:bodyPr/>
                     <a:lstStyle/>
                     <a:p>
+                      <a:pPr>
+                        <a:defRPr sz="900"/>
+                      </a:pPr>
                       <a:r>
                         <a:t>Follow</a:t>
                       </a:r>
@@ -3787,6 +3907,9 @@
                     <a:bodyPr/>
                     <a:lstStyle/>
                     <a:p>
+                      <a:pPr>
+                        <a:defRPr sz="900"/>
+                      </a:pPr>
                       <a:r>
                         <a:rPr lang="en-GB" dirty="0"/>
                         <a:t>30</a:t>
@@ -3800,6 +3923,9 @@
                     <a:bodyPr/>
                     <a:lstStyle/>
                     <a:p>
+                      <a:pPr>
+                        <a:defRPr sz="900"/>
+                      </a:pPr>
                       <a:r>
                         <a:rPr lang="en-GB" dirty="0"/>
                         <a:t>28</a:t>
@@ -3813,6 +3939,9 @@
                     <a:bodyPr/>
                     <a:lstStyle/>
                     <a:p>
+                      <a:pPr>
+                        <a:defRPr sz="900"/>
+                      </a:pPr>
                       <a:r>
                         <a:rPr lang="en-GB" dirty="0"/>
                         <a:t>93.3%</a:t>
@@ -3833,6 +3962,9 @@
                     <a:bodyPr/>
                     <a:lstStyle/>
                     <a:p>
+                      <a:pPr>
+                        <a:defRPr sz="900"/>
+                      </a:pPr>
                       <a:r>
                         <a:rPr lang="en-GB" dirty="0"/>
                         <a:t>Left</a:t>
@@ -3846,6 +3978,9 @@
                     <a:bodyPr/>
                     <a:lstStyle/>
                     <a:p>
+                      <a:pPr>
+                        <a:defRPr sz="900"/>
+                      </a:pPr>
                       <a:r>
                         <a:rPr lang="en-GB" dirty="0"/>
                         <a:t>30</a:t>
@@ -3859,6 +3994,9 @@
                     <a:bodyPr/>
                     <a:lstStyle/>
                     <a:p>
+                      <a:pPr>
+                        <a:defRPr sz="900"/>
+                      </a:pPr>
                       <a:r>
                         <a:rPr lang="en-GB" dirty="0"/>
                         <a:t>30</a:t>
@@ -3872,6 +4010,9 @@
                     <a:bodyPr/>
                     <a:lstStyle/>
                     <a:p>
+                      <a:pPr>
+                        <a:defRPr sz="900"/>
+                      </a:pPr>
                       <a:r>
                         <a:rPr lang="en-GB" dirty="0"/>
                         <a:t>100.0%</a:t>
@@ -3892,6 +4033,9 @@
                     <a:bodyPr/>
                     <a:lstStyle/>
                     <a:p>
+                      <a:pPr>
+                        <a:defRPr sz="900"/>
+                      </a:pPr>
                       <a:r>
                         <a:t>Right</a:t>
                       </a:r>
@@ -3904,6 +4048,9 @@
                     <a:bodyPr/>
                     <a:lstStyle/>
                     <a:p>
+                      <a:pPr>
+                        <a:defRPr sz="900"/>
+                      </a:pPr>
                       <a:r>
                         <a:rPr lang="en-GB" dirty="0"/>
                         <a:t>30</a:t>
@@ -3917,6 +4064,9 @@
                     <a:bodyPr/>
                     <a:lstStyle/>
                     <a:p>
+                      <a:pPr>
+                        <a:defRPr sz="900"/>
+                      </a:pPr>
                       <a:r>
                         <a:rPr lang="en-GB" dirty="0"/>
                         <a:t>30</a:t>
@@ -3930,6 +4080,9 @@
                     <a:bodyPr/>
                     <a:lstStyle/>
                     <a:p>
+                      <a:pPr>
+                        <a:defRPr sz="900"/>
+                      </a:pPr>
                       <a:r>
                         <a:rPr lang="en-GB" dirty="0"/>
                         <a:t>100.0%</a:t>
@@ -3950,6 +4103,9 @@
                     <a:bodyPr/>
                     <a:lstStyle/>
                     <a:p>
+                      <a:pPr>
+                        <a:defRPr sz="900"/>
+                      </a:pPr>
                       <a:r>
                         <a:rPr lang="en-GB" dirty="0"/>
                         <a:t>Back</a:t>
@@ -3963,6 +4119,9 @@
                     <a:bodyPr/>
                     <a:lstStyle/>
                     <a:p>
+                      <a:pPr>
+                        <a:defRPr sz="900"/>
+                      </a:pPr>
                       <a:r>
                         <a:rPr lang="en-GB" dirty="0"/>
                         <a:t>30</a:t>
@@ -3976,6 +4135,9 @@
                     <a:bodyPr/>
                     <a:lstStyle/>
                     <a:p>
+                      <a:pPr>
+                        <a:defRPr sz="900"/>
+                      </a:pPr>
                       <a:r>
                         <a:rPr lang="en-GB" dirty="0"/>
                         <a:t>30</a:t>
@@ -3989,6 +4151,9 @@
                     <a:bodyPr/>
                     <a:lstStyle/>
                     <a:p>
+                      <a:pPr>
+                        <a:defRPr sz="900"/>
+                      </a:pPr>
                       <a:r>
                         <a:rPr lang="en-GB" dirty="0"/>
                         <a:t>100.0%</a:t>
@@ -4009,6 +4174,9 @@
                     <a:bodyPr/>
                     <a:lstStyle/>
                     <a:p>
+                      <a:pPr>
+                        <a:defRPr sz="900"/>
+                      </a:pPr>
                       <a:r>
                         <a:rPr lang="en-GB" dirty="0"/>
                         <a:t>Aggregate</a:t>
@@ -4022,6 +4190,9 @@
                     <a:bodyPr/>
                     <a:lstStyle/>
                     <a:p>
+                      <a:pPr>
+                        <a:defRPr sz="900"/>
+                      </a:pPr>
                       <a:r>
                         <a:rPr lang="en-GB" dirty="0"/>
                         <a:t>180</a:t>
@@ -4035,6 +4206,9 @@
                     <a:bodyPr/>
                     <a:lstStyle/>
                     <a:p>
+                      <a:pPr>
+                        <a:defRPr sz="900"/>
+                      </a:pPr>
                       <a:r>
                         <a:rPr lang="en-GB" dirty="0"/>
                         <a:t>174</a:t>
@@ -4048,6 +4222,9 @@
                     <a:bodyPr/>
                     <a:lstStyle/>
                     <a:p>
+                      <a:pPr>
+                        <a:defRPr sz="900"/>
+                      </a:pPr>
                       <a:r>
                         <a:rPr lang="en-GB" dirty="0"/>
                         <a:t>96.67%</a:t>
@@ -4164,6 +4341,9 @@
           </a:bodyPr>
           <a:lstStyle/>
           <a:p>
+            <a:pPr>
+              <a:defRPr sz="950"/>
+            </a:pPr>
             <a:r>
               <a:t>Figure 16: Per-Class Classification Accuracy of the Trained MLP Gesture Model</a:t>
             </a:r>
@@ -4731,6 +4911,12 @@
           </a:bodyPr>
           <a:lstStyle/>
           <a:p>
+            <a:pPr>
+              <a:spcAft>
+                <a:spcPts val="200"/>
+              </a:spcAft>
+              <a:defRPr sz="950"/>
+            </a:pPr>
             <a:r>
               <a:rPr lang="en-GB" sz="2400" dirty="0">
                 <a:latin typeface="Gill Sans MT" panose="020B0502020104020203" pitchFamily="34" charset="0"/>
@@ -4745,6 +4931,12 @@
             </a:r>
           </a:p>
           <a:p>
+            <a:pPr>
+              <a:spcAft>
+                <a:spcPts val="200"/>
+              </a:spcAft>
+              <a:defRPr sz="950"/>
+            </a:pPr>
             <a:r>
               <a:rPr lang="en-GB" sz="2400" dirty="0">
                 <a:latin typeface="Gill Sans MT" panose="020B0502020104020203" pitchFamily="34" charset="0"/>
@@ -4759,6 +4951,12 @@
             </a:r>
           </a:p>
           <a:p>
+            <a:pPr>
+              <a:spcAft>
+                <a:spcPts val="200"/>
+              </a:spcAft>
+              <a:defRPr sz="950"/>
+            </a:pPr>
             <a:r>
               <a:rPr lang="en-GB" sz="2400" dirty="0">
                 <a:latin typeface="Gill Sans MT" panose="020B0502020104020203" pitchFamily="34" charset="0"/>
@@ -4773,6 +4971,12 @@
             </a:r>
           </a:p>
           <a:p>
+            <a:pPr>
+              <a:spcAft>
+                <a:spcPts val="200"/>
+              </a:spcAft>
+              <a:defRPr sz="950"/>
+            </a:pPr>
             <a:r>
               <a:rPr lang="en-GB" sz="2400" dirty="0">
                 <a:latin typeface="Gill Sans MT" panose="020B0502020104020203" pitchFamily="34" charset="0"/>
@@ -4787,6 +4991,12 @@
             </a:r>
           </a:p>
           <a:p>
+            <a:pPr>
+              <a:spcAft>
+                <a:spcPts val="200"/>
+              </a:spcAft>
+              <a:defRPr sz="950"/>
+            </a:pPr>
             <a:r>
               <a:rPr lang="en-GB" sz="2400" dirty="0">
                 <a:latin typeface="Gill Sans MT" panose="020B0502020104020203" pitchFamily="34" charset="0"/>
@@ -4795,6 +5005,12 @@
             </a:r>
           </a:p>
           <a:p>
+            <a:pPr>
+              <a:spcAft>
+                <a:spcPts val="200"/>
+              </a:spcAft>
+              <a:defRPr sz="950"/>
+            </a:pPr>
             <a:r>
               <a:rPr lang="en-GB" sz="2400" dirty="0">
                 <a:latin typeface="Gill Sans MT" panose="020B0502020104020203" pitchFamily="34" charset="0"/>
@@ -4803,6 +5019,12 @@
             </a:r>
           </a:p>
           <a:p>
+            <a:pPr>
+              <a:spcAft>
+                <a:spcPts val="200"/>
+              </a:spcAft>
+              <a:defRPr sz="950"/>
+            </a:pPr>
             <a:r>
               <a:rPr lang="en-GB" sz="2400" dirty="0">
                 <a:latin typeface="Gill Sans MT" panose="020B0502020104020203" pitchFamily="34" charset="0"/>
@@ -4898,8 +5120,12 @@
           <a:lstStyle/>
           <a:p>
             <a:pPr marL="285750" indent="-285750">
+              <a:spcAft>
+                <a:spcPts val="200"/>
+              </a:spcAft>
               <a:buFont typeface="Arial" panose="020B0604020202020204" pitchFamily="34" charset="0"/>
               <a:buChar char="•"/>
+              <a:defRPr sz="950"/>
             </a:pPr>
             <a:r>
               <a:rPr lang="en-GB" sz="2400" dirty="0">
@@ -4922,8 +5148,12 @@
           </a:p>
           <a:p>
             <a:pPr marL="285750" indent="-285750">
+              <a:spcAft>
+                <a:spcPts val="200"/>
+              </a:spcAft>
               <a:buFont typeface="Arial" panose="020B0604020202020204" pitchFamily="34" charset="0"/>
               <a:buChar char="•"/>
+              <a:defRPr sz="950"/>
             </a:pPr>
             <a:r>
               <a:rPr lang="en-GB" sz="2400" dirty="0">
@@ -4946,8 +5176,12 @@
           </a:p>
           <a:p>
             <a:pPr marL="285750" indent="-285750">
+              <a:spcAft>
+                <a:spcPts val="200"/>
+              </a:spcAft>
               <a:buFont typeface="Arial" panose="020B0604020202020204" pitchFamily="34" charset="0"/>
               <a:buChar char="•"/>
+              <a:defRPr sz="950"/>
             </a:pPr>
             <a:r>
               <a:rPr lang="en-GB" sz="2400" dirty="0">
@@ -4970,8 +5204,12 @@
           </a:p>
           <a:p>
             <a:pPr marL="285750" indent="-285750">
+              <a:spcAft>
+                <a:spcPts val="200"/>
+              </a:spcAft>
               <a:buFont typeface="Arial" panose="020B0604020202020204" pitchFamily="34" charset="0"/>
               <a:buChar char="•"/>
+              <a:defRPr sz="950"/>
             </a:pPr>
             <a:r>
               <a:rPr lang="en-GB" sz="2400" dirty="0">
@@ -4994,8 +5232,12 @@
           </a:p>
           <a:p>
             <a:pPr marL="285750" indent="-285750">
+              <a:spcAft>
+                <a:spcPts val="200"/>
+              </a:spcAft>
               <a:buFont typeface="Arial" panose="020B0604020202020204" pitchFamily="34" charset="0"/>
               <a:buChar char="•"/>
+              <a:defRPr sz="950"/>
             </a:pPr>
             <a:r>
               <a:rPr lang="en-GB" sz="2400" dirty="0">
@@ -5009,8 +5251,12 @@
           </a:p>
           <a:p>
             <a:pPr marL="285750" indent="-285750">
+              <a:spcAft>
+                <a:spcPts val="200"/>
+              </a:spcAft>
               <a:buFont typeface="Arial" panose="020B0604020202020204" pitchFamily="34" charset="0"/>
               <a:buChar char="•"/>
+              <a:defRPr sz="950"/>
             </a:pPr>
             <a:r>
               <a:rPr lang="en-GB" sz="2400" dirty="0">
@@ -5030,8 +5276,12 @@
           </a:p>
           <a:p>
             <a:pPr marL="285750" indent="-285750">
+              <a:spcAft>
+                <a:spcPts val="200"/>
+              </a:spcAft>
               <a:buFont typeface="Arial" panose="020B0604020202020204" pitchFamily="34" charset="0"/>
               <a:buChar char="•"/>
+              <a:defRPr sz="950"/>
             </a:pPr>
             <a:r>
               <a:rPr lang="en-GB" sz="2400" dirty="0">
@@ -5189,221 +5439,45 @@
               <a:lnSpc>
                 <a:spcPct val="150000"/>
               </a:lnSpc>
+              <a:spcAft>
+                <a:spcPts val="400"/>
+              </a:spcAft>
               <a:buNone/>
-            </a:pPr>
-            <a:r>
-              <a:rPr lang="en-US" sz="2000" b="1" dirty="0">
-                <a:latin typeface="Gill Sans MT" panose="020B0502020104020203" pitchFamily="34" charset="0"/>
-              </a:rPr>
-              <a:t>[1]</a:t>
-            </a:r>
-            <a:r>
-              <a:rPr lang="en-US" sz="2000" dirty="0">
-                <a:latin typeface="Gill Sans MT" panose="020B0502020104020203" pitchFamily="34" charset="0"/>
-              </a:rPr>
-              <a:t> D. </a:t>
-            </a:r>
-            <a:r>
-              <a:rPr lang="en-US" sz="2000" dirty="0" err="1">
-                <a:latin typeface="Gill Sans MT" panose="020B0502020104020203" pitchFamily="34" charset="0"/>
-              </a:rPr>
-              <a:t>Tsitos</a:t>
-            </a:r>
-            <a:r>
-              <a:rPr lang="en-US" sz="2000" dirty="0">
-                <a:latin typeface="Gill Sans MT" panose="020B0502020104020203" pitchFamily="34" charset="0"/>
-              </a:rPr>
-              <a:t> </a:t>
-            </a:r>
-            <a:r>
-              <a:rPr lang="en-US" sz="2000" i="1" dirty="0">
-                <a:latin typeface="Gill Sans MT" panose="020B0502020104020203" pitchFamily="34" charset="0"/>
-              </a:rPr>
-              <a:t>et al</a:t>
-            </a:r>
-            <a:r>
-              <a:rPr lang="en-US" sz="2000" dirty="0">
-                <a:latin typeface="Gill Sans MT" panose="020B0502020104020203" pitchFamily="34" charset="0"/>
-              </a:rPr>
-              <a:t>., “Real-Time Feasibility of a Human Intention Prediction Method Evaluated Through a Competitive Human–Robot Reaching Game,” </a:t>
-            </a:r>
-            <a:r>
-              <a:rPr lang="en-US" sz="2000" i="1" dirty="0">
-                <a:latin typeface="Gill Sans MT" panose="020B0502020104020203" pitchFamily="34" charset="0"/>
-              </a:rPr>
-              <a:t>IEEE Robotics and Automation Letters</a:t>
-            </a:r>
-            <a:r>
-              <a:rPr lang="en-US" sz="2000" dirty="0">
-                <a:latin typeface="Gill Sans MT" panose="020B0502020104020203" pitchFamily="34" charset="0"/>
-              </a:rPr>
-              <a:t>, vol. 7, no. 4, pp. 10034–10041, Oct. 2022. </a:t>
-            </a:r>
-          </a:p>
-          <a:p>
-            <a:pPr marL="0" indent="0">
-              <a:lnSpc>
-                <a:spcPct val="150000"/>
-              </a:lnSpc>
-              <a:buNone/>
-            </a:pPr>
-            <a:r>
-              <a:rPr lang="en-US" sz="2000" b="1" dirty="0">
-                <a:latin typeface="Gill Sans MT" panose="020B0502020104020203" pitchFamily="34" charset="0"/>
-              </a:rPr>
-              <a:t>[2]</a:t>
-            </a:r>
-            <a:r>
-              <a:rPr lang="en-US" sz="2000" dirty="0">
-                <a:latin typeface="Gill Sans MT" panose="020B0502020104020203" pitchFamily="34" charset="0"/>
-              </a:rPr>
-              <a:t> J. A. Mahmud, B. C. Das, J. Shin, K. M. </a:t>
-            </a:r>
-            <a:r>
-              <a:rPr lang="en-US" sz="2000" dirty="0" err="1">
-                <a:latin typeface="Gill Sans MT" panose="020B0502020104020203" pitchFamily="34" charset="0"/>
-              </a:rPr>
-              <a:t>Hasib</a:t>
-            </a:r>
-            <a:r>
-              <a:rPr lang="en-US" sz="2000" dirty="0">
-                <a:latin typeface="Gill Sans MT" panose="020B0502020104020203" pitchFamily="34" charset="0"/>
-              </a:rPr>
-              <a:t>, R. </a:t>
-            </a:r>
-            <a:r>
-              <a:rPr lang="en-US" sz="2000" dirty="0" err="1">
-                <a:latin typeface="Gill Sans MT" panose="020B0502020104020203" pitchFamily="34" charset="0"/>
-              </a:rPr>
-              <a:t>Sadik</a:t>
-            </a:r>
-            <a:r>
-              <a:rPr lang="en-US" sz="2000" dirty="0">
-                <a:latin typeface="Gill Sans MT" panose="020B0502020104020203" pitchFamily="34" charset="0"/>
-              </a:rPr>
-              <a:t>, and M. F. </a:t>
-            </a:r>
-            <a:r>
-              <a:rPr lang="en-US" sz="2000" dirty="0" err="1">
-                <a:latin typeface="Gill Sans MT" panose="020B0502020104020203" pitchFamily="34" charset="0"/>
-              </a:rPr>
-              <a:t>Mridha</a:t>
-            </a:r>
-            <a:r>
-              <a:rPr lang="en-US" sz="2000" dirty="0">
-                <a:latin typeface="Gill Sans MT" panose="020B0502020104020203" pitchFamily="34" charset="0"/>
-              </a:rPr>
-              <a:t>, “3D Gesture Recognition and Adaptation for Human–Robot Interaction,” </a:t>
-            </a:r>
-            <a:r>
-              <a:rPr lang="en-US" sz="2000" i="1" dirty="0">
-                <a:latin typeface="Gill Sans MT" panose="020B0502020104020203" pitchFamily="34" charset="0"/>
-              </a:rPr>
-              <a:t>IEEE Access</a:t>
-            </a:r>
-            <a:r>
-              <a:rPr lang="en-US" sz="2000" dirty="0">
-                <a:latin typeface="Gill Sans MT" panose="020B0502020104020203" pitchFamily="34" charset="0"/>
-              </a:rPr>
-              <a:t>, vol. 10, pp. 116485–116507, 2022.</a:t>
-            </a:r>
-          </a:p>
-          <a:p>
-            <a:pPr marL="0" indent="0">
-              <a:lnSpc>
-                <a:spcPct val="150000"/>
-              </a:lnSpc>
-              <a:buNone/>
-            </a:pPr>
-            <a:r>
-              <a:rPr lang="en-US" sz="2000" b="1" dirty="0">
-                <a:latin typeface="Gill Sans MT" panose="020B0502020104020203" pitchFamily="34" charset="0"/>
-              </a:rPr>
-              <a:t>[3]</a:t>
-            </a:r>
-            <a:r>
-              <a:rPr lang="en-US" sz="2000" dirty="0">
-                <a:latin typeface="Gill Sans MT" panose="020B0502020104020203" pitchFamily="34" charset="0"/>
-              </a:rPr>
-              <a:t> G. Yang, S. Wang, H. Okamura, Y. Ueda, T. </a:t>
-            </a:r>
-            <a:r>
-              <a:rPr lang="en-US" sz="2000" dirty="0" err="1">
-                <a:latin typeface="Gill Sans MT" panose="020B0502020104020203" pitchFamily="34" charset="0"/>
-              </a:rPr>
-              <a:t>Yasui</a:t>
-            </a:r>
-            <a:r>
-              <a:rPr lang="en-US" sz="2000" dirty="0">
-                <a:latin typeface="Gill Sans MT" panose="020B0502020104020203" pitchFamily="34" charset="0"/>
-              </a:rPr>
-              <a:t>, T. Yamada, Y. Miyazawa, S. Yoshida, Y. Inada, S. </a:t>
-            </a:r>
-            <a:r>
-              <a:rPr lang="en-US" sz="2000" dirty="0" err="1">
-                <a:latin typeface="Gill Sans MT" panose="020B0502020104020203" pitchFamily="34" charset="0"/>
-              </a:rPr>
-              <a:t>Ino</a:t>
-            </a:r>
-            <a:r>
-              <a:rPr lang="en-US" sz="2000" dirty="0">
-                <a:latin typeface="Gill Sans MT" panose="020B0502020104020203" pitchFamily="34" charset="0"/>
-              </a:rPr>
-              <a:t>, K. </a:t>
-            </a:r>
-            <a:r>
-              <a:rPr lang="en-US" sz="2000" dirty="0" err="1">
-                <a:latin typeface="Gill Sans MT" panose="020B0502020104020203" pitchFamily="34" charset="0"/>
-              </a:rPr>
-              <a:t>Okuhata</a:t>
-            </a:r>
-            <a:r>
-              <a:rPr lang="en-US" sz="2000" dirty="0">
-                <a:latin typeface="Gill Sans MT" panose="020B0502020104020203" pitchFamily="34" charset="0"/>
-              </a:rPr>
-              <a:t>, and Y. </a:t>
-            </a:r>
-            <a:r>
-              <a:rPr lang="en-US" sz="2000" dirty="0" err="1">
-                <a:latin typeface="Gill Sans MT" panose="020B0502020104020203" pitchFamily="34" charset="0"/>
-              </a:rPr>
-              <a:t>Mizobuchi</a:t>
-            </a:r>
-            <a:r>
-              <a:rPr lang="en-US" sz="2000" dirty="0">
-                <a:latin typeface="Gill Sans MT" panose="020B0502020104020203" pitchFamily="34" charset="0"/>
-              </a:rPr>
-              <a:t>, “Safe and Efficient Motion Planning for Material Transportation Robots Considering Intention Prediction of Obstacles,” in </a:t>
-            </a:r>
-            <a:r>
-              <a:rPr lang="en-US" sz="2000" i="1" dirty="0">
-                <a:latin typeface="Gill Sans MT" panose="020B0502020104020203" pitchFamily="34" charset="0"/>
-              </a:rPr>
-              <a:t>Proc. IEEE Int. Conf. Mechatronics </a:t>
-            </a:r>
-            <a:r>
-              <a:rPr lang="en-US" sz="2000" i="1" dirty="0" err="1">
-                <a:latin typeface="Gill Sans MT" panose="020B0502020104020203" pitchFamily="34" charset="0"/>
-              </a:rPr>
-              <a:t>Autom</a:t>
-            </a:r>
-            <a:r>
-              <a:rPr lang="en-US" sz="2000" i="1" dirty="0">
-                <a:latin typeface="Gill Sans MT" panose="020B0502020104020203" pitchFamily="34" charset="0"/>
-              </a:rPr>
-              <a:t>. (ICMA)</a:t>
-            </a:r>
-            <a:r>
-              <a:rPr lang="en-US" sz="2000" dirty="0">
-                <a:latin typeface="Gill Sans MT" panose="020B0502020104020203" pitchFamily="34" charset="0"/>
-              </a:rPr>
-              <a:t>, Harbin, China, Aug. 2023, pp. 1179–1184.</a:t>
+              <a:defRPr sz="900" b="0" i="0"/>
+            </a:pPr>
+            <a:r>
+              <a:t>[1] D. Tsitos et al., “Real-Time Feasibility of a Human Intention Prediction Method Evaluated Through a Competitive Human–Robot Reaching Game,” IEEE Robotics and Automation Letters, vol. 7, no. 4, pp. 10034–10041, Oct. 2022.</a:t>
+            </a:r>
+          </a:p>
+          <a:p>
+            <a:pPr>
+              <a:spcAft>
+                <a:spcPts val="400"/>
+              </a:spcAft>
+              <a:defRPr sz="900" b="0" i="0"/>
+            </a:pPr>
+            <a:r>
+              <a:t>[2] J. A. Mahmud, B. C. Das, J. Shin, K. M. Hasib, R. Sadik, and M. F. Mridha, “3D Gesture Recognition and Adaptation for Human–Robot Interaction,” IEEE Access, vol. 10, pp. 116485–116507, 2022.</a:t>
+            </a:r>
+          </a:p>
+          <a:p>
+            <a:pPr>
+              <a:spcAft>
+                <a:spcPts val="400"/>
+              </a:spcAft>
+              <a:defRPr sz="900" b="0" i="0"/>
+            </a:pPr>
+            <a:r>
+              <a:t>[3] G. Yang et al., “Safe and Efficient Motion Planning for Material Transportation Robots Considering Intention Prediction of Obstacles,” in Proc. IEEE Int. Conf. Mechatronics Autom. (ICMA), Harbin, China, 2023, pp. 1179–1184.</a:t>
             </a:r>
           </a:p>
           <a:p>
             <a:br/>
-            <a:pPr>
-              <a:defRPr sz="1600" b="1">
+            <a:pPr algn="ctr">
+              <a:spcAft>
+                <a:spcPts val="200"/>
+              </a:spcAft>
+              <a:defRPr sz="1400" b="1" i="0">
                 <a:solidFill>
                   <a:srgbClr val="0096B4"/>
                 </a:solidFill>
@@ -5496,563 +5570,139 @@
           </a:p>
         </p:txBody>
       </p:sp>
-      <p:graphicFrame>
-        <p:nvGraphicFramePr>
-          <p:cNvPr id="4" name="Content Placeholder 3"/>
-          <p:cNvGraphicFramePr>
-            <a:graphicFrameLocks noGrp="1"/>
-          </p:cNvGraphicFramePr>
-          <p:nvPr>
-            <p:ph idx="1"/>
-            <p:extLst>
-              <p:ext uri="{D42A27DB-BD31-4B8C-83A1-F6EECF244321}">
-                <p14:modId xmlns:p14="http://schemas.microsoft.com/office/powerpoint/2010/main" val="2563616658"/>
-              </p:ext>
-            </p:extLst>
-          </p:nvPr>
-        </p:nvGraphicFramePr>
-        <p:xfrm>
-          <a:off x="717494" y="1267274"/>
-          <a:ext cx="10636306" cy="6590792"/>
-        </p:xfrm>
-        <a:graphic>
-          <a:graphicData uri="http://schemas.openxmlformats.org/drawingml/2006/table">
-            <a:tbl>
-              <a:tblPr firstRow="1" bandRow="1">
-                <a:tableStyleId>{5C22544A-7EE6-4342-B048-85BDC9FD1C3A}</a:tableStyleId>
-              </a:tblPr>
-              <a:tblGrid>
-                <a:gridCol w="5318153">
-                  <a:extLst>
-                    <a:ext uri="{9D8B030D-6E8A-4147-A177-3AD203B41FA5}">
-                      <a16:colId xmlns:a16="http://schemas.microsoft.com/office/drawing/2014/main" val="468815543"/>
-                    </a:ext>
-                  </a:extLst>
-                </a:gridCol>
-                <a:gridCol w="5318153">
-                  <a:extLst>
-                    <a:ext uri="{9D8B030D-6E8A-4147-A177-3AD203B41FA5}">
-                      <a16:colId xmlns:a16="http://schemas.microsoft.com/office/drawing/2014/main" val="2656849321"/>
-                    </a:ext>
-                  </a:extLst>
-                </a:gridCol>
-              </a:tblGrid>
-              <a:tr h="4122021">
-                <a:tc>
-                  <a:txBody>
-                    <a:bodyPr/>
-                    <a:lstStyle/>
-                    <a:p>
-                      <a:pPr marL="342900" indent="-342900">
-                        <a:lnSpc>
-                          <a:spcPct val="200000"/>
-                        </a:lnSpc>
-                        <a:buFont typeface="Wingdings" panose="05000000000000000000" pitchFamily="2" charset="2"/>
-                        <a:buChar char="§"/>
-                      </a:pPr>
-                      <a:r>
-                        <a:rPr lang="en-US" sz="2000" b="0" dirty="0">
-                          <a:solidFill>
-                            <a:schemeClr val="bg1"/>
-                          </a:solidFill>
-                          <a:latin typeface="Gill Sans MT" panose="020B0502020104020203" pitchFamily="34" charset="0"/>
-                        </a:rPr>
-                        <a:t>Introduction </a:t>
-                      </a:r>
-                    </a:p>
-                    <a:p>
-                      <a:pPr marL="342900" indent="-342900">
-                        <a:lnSpc>
-                          <a:spcPct val="200000"/>
-                        </a:lnSpc>
-                        <a:buFont typeface="Wingdings" panose="05000000000000000000" pitchFamily="2" charset="2"/>
-                        <a:buChar char="§"/>
-                      </a:pPr>
-                      <a:r>
-                        <a:rPr lang="en-US" sz="2000" b="0" dirty="0">
-                          <a:solidFill>
-                            <a:schemeClr val="bg1"/>
-                          </a:solidFill>
-                          <a:latin typeface="Gill Sans MT" panose="020B0502020104020203" pitchFamily="34" charset="0"/>
-                        </a:rPr>
-                        <a:t>Problem Statement </a:t>
-                      </a:r>
-                    </a:p>
-                    <a:p>
-                      <a:pPr marL="342900" indent="-342900">
-                        <a:lnSpc>
-                          <a:spcPct val="200000"/>
-                        </a:lnSpc>
-                        <a:buFont typeface="Wingdings" panose="05000000000000000000" pitchFamily="2" charset="2"/>
-                        <a:buChar char="§"/>
-                      </a:pPr>
-                      <a:r>
-                        <a:rPr lang="en-US" sz="2000" b="0" dirty="0">
-                          <a:solidFill>
-                            <a:schemeClr val="bg1"/>
-                          </a:solidFill>
-                          <a:latin typeface="Gill Sans MT" panose="020B0502020104020203" pitchFamily="34" charset="0"/>
-                        </a:rPr>
-                        <a:t>Objectives of Study </a:t>
-                      </a:r>
-                    </a:p>
-                    <a:p>
-                      <a:pPr marL="342900" indent="-342900">
-                        <a:lnSpc>
-                          <a:spcPct val="200000"/>
-                        </a:lnSpc>
-                        <a:buFont typeface="Wingdings" panose="05000000000000000000" pitchFamily="2" charset="2"/>
-                        <a:buChar char="§"/>
-                      </a:pPr>
-                      <a:r>
-                        <a:rPr lang="en-US" sz="2000" b="0" dirty="0">
-                          <a:solidFill>
-                            <a:schemeClr val="bg1"/>
-                          </a:solidFill>
-                          <a:latin typeface="Gill Sans MT" panose="020B0502020104020203" pitchFamily="34" charset="0"/>
-                        </a:rPr>
-                        <a:t>Significance of Study </a:t>
-                      </a:r>
-                    </a:p>
-                    <a:p>
-                      <a:pPr marL="342900" indent="-342900">
-                        <a:lnSpc>
-                          <a:spcPct val="200000"/>
-                        </a:lnSpc>
-                        <a:buFont typeface="Wingdings" panose="05000000000000000000" pitchFamily="2" charset="2"/>
-                        <a:buChar char="§"/>
-                      </a:pPr>
-                      <a:r>
-                        <a:rPr lang="en-US" sz="2000" b="0" dirty="0">
-                          <a:solidFill>
-                            <a:schemeClr val="bg1"/>
-                          </a:solidFill>
-                          <a:latin typeface="Gill Sans MT" panose="020B0502020104020203" pitchFamily="34" charset="0"/>
-                        </a:rPr>
-                        <a:t>Research</a:t>
-                      </a:r>
-                      <a:r>
-                        <a:rPr lang="en-US" sz="2000" b="0" baseline="0" dirty="0">
-                          <a:solidFill>
-                            <a:schemeClr val="bg1"/>
-                          </a:solidFill>
-                          <a:latin typeface="Gill Sans MT" panose="020B0502020104020203" pitchFamily="34" charset="0"/>
-                        </a:rPr>
-                        <a:t> Gaps</a:t>
-                      </a:r>
-                      <a:endParaRPr lang="en-US" sz="2000" b="0" dirty="0">
-                        <a:solidFill>
-                          <a:schemeClr val="bg1"/>
-                        </a:solidFill>
-                        <a:latin typeface="Gill Sans MT" panose="020B0502020104020203" pitchFamily="34" charset="0"/>
-                      </a:endParaRPr>
-                    </a:p>
-                    <a:p>
-                      <a:pPr marL="342900" marR="0" lvl="0" indent="-342900" algn="l" defTabSz="914400" rtl="0" eaLnBrk="1" fontAlgn="auto" latinLnBrk="0" hangingPunct="1">
-                        <a:lnSpc>
-                          <a:spcPct val="200000"/>
-                        </a:lnSpc>
-                        <a:spcBef>
-                          <a:spcPts val="0"/>
-                        </a:spcBef>
-                        <a:spcAft>
-                          <a:spcPts val="0"/>
-                        </a:spcAft>
-                        <a:buClrTx/>
-                        <a:buSzTx/>
-                        <a:buFont typeface="Wingdings" panose="05000000000000000000" pitchFamily="2" charset="2"/>
-                        <a:buChar char="§"/>
-                        <a:tabLst/>
-                        <a:defRPr/>
-                      </a:pPr>
-                      <a:r>
-                        <a:rPr lang="en-US" sz="2000" b="0" dirty="0">
-                          <a:solidFill>
-                            <a:schemeClr val="bg1"/>
-                          </a:solidFill>
-                          <a:latin typeface="Gill Sans MT" panose="020B0502020104020203" pitchFamily="34" charset="0"/>
-                        </a:rPr>
-                        <a:t>Literature</a:t>
-                      </a:r>
-                      <a:r>
-                        <a:rPr lang="en-US" sz="2000" b="0" baseline="0" dirty="0">
-                          <a:solidFill>
-                            <a:schemeClr val="bg1"/>
-                          </a:solidFill>
-                          <a:latin typeface="Gill Sans MT" panose="020B0502020104020203" pitchFamily="34" charset="0"/>
-                        </a:rPr>
-                        <a:t> Review</a:t>
-                      </a:r>
-                    </a:p>
-                    <a:p>
-                      <a:pPr marL="342900" marR="0" lvl="0" indent="-342900" algn="l" defTabSz="914400" rtl="0" eaLnBrk="1" fontAlgn="auto" latinLnBrk="0" hangingPunct="1">
-                        <a:lnSpc>
-                          <a:spcPct val="200000"/>
-                        </a:lnSpc>
-                        <a:spcBef>
-                          <a:spcPts val="0"/>
-                        </a:spcBef>
-                        <a:spcAft>
-                          <a:spcPts val="0"/>
-                        </a:spcAft>
-                        <a:buClrTx/>
-                        <a:buSzTx/>
-                        <a:buFont typeface="Wingdings" panose="05000000000000000000" pitchFamily="2" charset="2"/>
-                        <a:buChar char="§"/>
-                        <a:tabLst/>
-                        <a:defRPr/>
-                      </a:pPr>
-                      <a:r>
-                        <a:rPr lang="en-US" sz="2000" b="0" dirty="0">
-                          <a:solidFill>
-                            <a:schemeClr val="bg1"/>
-                          </a:solidFill>
-                          <a:latin typeface="Gill Sans MT" panose="020B0502020104020203" pitchFamily="34" charset="0"/>
-                        </a:rPr>
-                        <a:t>Methodology</a:t>
-                      </a:r>
-                    </a:p>
-                    <a:p>
-                      <a:pPr marL="342900" marR="0" lvl="0" indent="-342900" algn="l" defTabSz="914400" rtl="0" eaLnBrk="1" fontAlgn="auto" latinLnBrk="0" hangingPunct="1">
-                        <a:lnSpc>
-                          <a:spcPct val="200000"/>
-                        </a:lnSpc>
-                        <a:spcBef>
-                          <a:spcPts val="0"/>
-                        </a:spcBef>
-                        <a:spcAft>
-                          <a:spcPts val="0"/>
-                        </a:spcAft>
-                        <a:buClrTx/>
-                        <a:buSzTx/>
-                        <a:buFont typeface="Wingdings" panose="05000000000000000000" pitchFamily="2" charset="2"/>
-                        <a:buChar char="§"/>
-                        <a:tabLst/>
-                        <a:defRPr/>
-                      </a:pPr>
-                      <a:r>
-                        <a:rPr lang="en-US" sz="2000" b="0" dirty="0">
-                          <a:solidFill>
-                            <a:schemeClr val="bg1"/>
-                          </a:solidFill>
-                          <a:latin typeface="Gill Sans MT" panose="020B0502020104020203" pitchFamily="34" charset="0"/>
-                        </a:rPr>
-                        <a:t>System  Architecture</a:t>
-                      </a:r>
-                      <a:r>
-                        <a:rPr lang="en-US" sz="1600" b="1" dirty="0">
-                          <a:solidFill>
-                            <a:schemeClr val="bg1"/>
-                          </a:solidFill>
-                          <a:latin typeface="Gill Sans MT" panose="020B0502020104020203" pitchFamily="34" charset="0"/>
-                        </a:rPr>
-                        <a:t> </a:t>
-                      </a:r>
-                    </a:p>
-                    <a:p>
-                      <a:pPr marL="342900" marR="0" lvl="0" indent="-342900" algn="l" defTabSz="914400" rtl="0" eaLnBrk="1" fontAlgn="auto" latinLnBrk="0" hangingPunct="1">
-                        <a:lnSpc>
-                          <a:spcPct val="200000"/>
-                        </a:lnSpc>
-                        <a:spcBef>
-                          <a:spcPts val="0"/>
-                        </a:spcBef>
-                        <a:spcAft>
-                          <a:spcPts val="0"/>
-                        </a:spcAft>
-                        <a:buClrTx/>
-                        <a:buSzTx/>
-                        <a:buFont typeface="Wingdings" panose="05000000000000000000" pitchFamily="2" charset="2"/>
-                        <a:buChar char="§"/>
-                        <a:tabLst/>
-                        <a:defRPr/>
-                      </a:pPr>
-                      <a:endParaRPr lang="en-US" sz="1600" b="1" baseline="0" dirty="0">
-                        <a:solidFill>
-                          <a:schemeClr val="bg1"/>
-                        </a:solidFill>
-                        <a:latin typeface="Gill Sans MT" panose="020B0502020104020203" pitchFamily="34" charset="0"/>
-                      </a:endParaRPr>
-                    </a:p>
-                    <a:p>
-                      <a:pPr marL="342900" marR="0" lvl="0" indent="-342900" algn="l" defTabSz="914400" rtl="0" eaLnBrk="1" fontAlgn="auto" latinLnBrk="0" hangingPunct="1">
-                        <a:lnSpc>
-                          <a:spcPct val="200000"/>
-                        </a:lnSpc>
-                        <a:spcBef>
-                          <a:spcPts val="0"/>
-                        </a:spcBef>
-                        <a:spcAft>
-                          <a:spcPts val="0"/>
-                        </a:spcAft>
-                        <a:buClrTx/>
-                        <a:buSzTx/>
-                        <a:buFont typeface="Wingdings" panose="05000000000000000000" pitchFamily="2" charset="2"/>
-                        <a:buChar char="§"/>
-                        <a:tabLst/>
-                        <a:defRPr/>
-                      </a:pPr>
-                      <a:endParaRPr lang="en-US" sz="1600" b="1" dirty="0">
-                        <a:solidFill>
-                          <a:schemeClr val="bg1"/>
-                        </a:solidFill>
-                        <a:latin typeface="Gill Sans MT" panose="020B0502020104020203" pitchFamily="34" charset="0"/>
-                      </a:endParaRPr>
-                    </a:p>
-                    <a:p>
-                      <a:pPr marL="342900" indent="-342900">
-                        <a:lnSpc>
-                          <a:spcPct val="200000"/>
-                        </a:lnSpc>
-                        <a:buFont typeface="Wingdings" panose="05000000000000000000" pitchFamily="2" charset="2"/>
-                        <a:buChar char="§"/>
-                      </a:pPr>
-                      <a:endParaRPr lang="en-US" sz="2500" dirty="0">
-                        <a:solidFill>
-                          <a:schemeClr val="bg1"/>
-                        </a:solidFill>
-                        <a:latin typeface="Gill Sans MT" panose="020B0502020104020203" pitchFamily="34" charset="0"/>
-                      </a:endParaRPr>
-                    </a:p>
-                  </a:txBody>
-                  <a:tcPr>
-                    <a:lnL w="12700" cmpd="sng">
-                      <a:noFill/>
-                    </a:lnL>
-                    <a:lnR w="12700" cmpd="sng">
-                      <a:noFill/>
-                    </a:lnR>
-                    <a:lnT w="12700" cmpd="sng">
-                      <a:noFill/>
-                    </a:lnT>
-                    <a:lnB w="38100" cmpd="sng">
-                      <a:noFill/>
-                    </a:lnB>
-                    <a:lnTlToBr w="12700" cmpd="sng">
-                      <a:noFill/>
-                      <a:prstDash val="solid"/>
-                    </a:lnTlToBr>
-                    <a:lnBlToTr w="12700" cmpd="sng">
-                      <a:noFill/>
-                      <a:prstDash val="solid"/>
-                    </a:lnBlToTr>
-                    <a:noFill/>
-                  </a:tcPr>
-                </a:tc>
-                <a:tc>
-                  <a:txBody>
-                    <a:bodyPr/>
-                    <a:lstStyle/>
-                    <a:p>
-                      <a:pPr marL="342900" marR="0" lvl="0" indent="-342900" algn="l" defTabSz="914400" rtl="0" eaLnBrk="1" fontAlgn="auto" latinLnBrk="0" hangingPunct="1">
-                        <a:lnSpc>
-                          <a:spcPct val="200000"/>
-                        </a:lnSpc>
-                        <a:spcBef>
-                          <a:spcPts val="0"/>
-                        </a:spcBef>
-                        <a:spcAft>
-                          <a:spcPts val="0"/>
-                        </a:spcAft>
-                        <a:buClrTx/>
-                        <a:buSzTx/>
-                        <a:buFont typeface="Wingdings" panose="05000000000000000000" pitchFamily="2" charset="2"/>
-                        <a:buChar char="§"/>
-                        <a:tabLst/>
-                        <a:defRPr/>
-                      </a:pPr>
-                      <a:r>
-                        <a:rPr lang="en-US" sz="2000" b="0" dirty="0">
-                          <a:solidFill>
-                            <a:schemeClr val="bg1"/>
-                          </a:solidFill>
-                          <a:latin typeface="Gill Sans MT" panose="020B0502020104020203" pitchFamily="34" charset="0"/>
-                        </a:rPr>
-                        <a:t>Hardware</a:t>
-                      </a:r>
-                      <a:r>
-                        <a:rPr lang="en-US" sz="2000" b="0" baseline="0" dirty="0">
-                          <a:solidFill>
-                            <a:schemeClr val="bg1"/>
-                          </a:solidFill>
-                          <a:latin typeface="Gill Sans MT" panose="020B0502020104020203" pitchFamily="34" charset="0"/>
-                        </a:rPr>
-                        <a:t> and Software Components</a:t>
-                      </a:r>
-                      <a:endParaRPr lang="en-US" sz="2000" b="0" dirty="0">
-                        <a:solidFill>
-                          <a:schemeClr val="bg1"/>
-                        </a:solidFill>
-                        <a:latin typeface="Gill Sans MT" panose="020B0502020104020203" pitchFamily="34" charset="0"/>
-                      </a:endParaRPr>
-                    </a:p>
-                    <a:p>
-                      <a:pPr marL="342900" indent="-342900">
-                        <a:lnSpc>
-                          <a:spcPct val="200000"/>
-                        </a:lnSpc>
-                        <a:buFont typeface="Wingdings" panose="05000000000000000000" pitchFamily="2" charset="2"/>
-                        <a:buChar char="§"/>
-                      </a:pPr>
-                      <a:r>
-                        <a:rPr lang="en-US" sz="2000" b="0" dirty="0">
-                          <a:solidFill>
-                            <a:schemeClr val="bg1"/>
-                          </a:solidFill>
-                          <a:latin typeface="Gill Sans MT" panose="020B0502020104020203" pitchFamily="34" charset="0"/>
-                        </a:rPr>
-                        <a:t> Data</a:t>
-                      </a:r>
-                      <a:r>
-                        <a:rPr lang="en-US" sz="2000" b="0" baseline="0" dirty="0">
-                          <a:solidFill>
-                            <a:schemeClr val="bg1"/>
-                          </a:solidFill>
-                          <a:latin typeface="Gill Sans MT" panose="020B0502020104020203" pitchFamily="34" charset="0"/>
-                        </a:rPr>
-                        <a:t>set Preparation and Gesture Recognition</a:t>
-                      </a:r>
-                    </a:p>
-                    <a:p>
-                      <a:pPr marL="342900" indent="-342900">
-                        <a:lnSpc>
-                          <a:spcPct val="200000"/>
-                        </a:lnSpc>
-                        <a:buFont typeface="Wingdings" panose="05000000000000000000" pitchFamily="2" charset="2"/>
-                        <a:buChar char="§"/>
-                      </a:pPr>
-                      <a:r>
-                        <a:rPr lang="en-US" sz="2000" b="0" baseline="0" dirty="0">
-                          <a:solidFill>
-                            <a:schemeClr val="bg1"/>
-                          </a:solidFill>
-                          <a:latin typeface="Gill Sans MT" panose="020B0502020104020203" pitchFamily="34" charset="0"/>
-                        </a:rPr>
-                        <a:t>SLAM</a:t>
-                      </a:r>
-                    </a:p>
-                    <a:p>
-                      <a:pPr marL="342900" indent="-342900">
-                        <a:lnSpc>
-                          <a:spcPct val="200000"/>
-                        </a:lnSpc>
-                        <a:buFont typeface="Wingdings" panose="05000000000000000000" pitchFamily="2" charset="2"/>
-                        <a:buChar char="§"/>
-                      </a:pPr>
-                      <a:r>
-                        <a:rPr lang="en-US" sz="2000" b="0" dirty="0">
-                          <a:solidFill>
-                            <a:schemeClr val="bg1"/>
-                          </a:solidFill>
-                          <a:latin typeface="Gill Sans MT" panose="020B0502020104020203" pitchFamily="34" charset="0"/>
-                        </a:rPr>
-                        <a:t>Testing and Results</a:t>
-                      </a:r>
-                    </a:p>
-                    <a:p>
-                      <a:pPr marL="342900" indent="-342900">
-                        <a:lnSpc>
-                          <a:spcPct val="200000"/>
-                        </a:lnSpc>
-                        <a:buFont typeface="Wingdings" panose="05000000000000000000" pitchFamily="2" charset="2"/>
-                        <a:buChar char="§"/>
-                      </a:pPr>
-                      <a:r>
-                        <a:rPr lang="en-US" sz="2000" b="0" dirty="0">
-                          <a:solidFill>
-                            <a:schemeClr val="bg1"/>
-                          </a:solidFill>
-                          <a:latin typeface="Gill Sans MT" panose="020B0502020104020203" pitchFamily="34" charset="0"/>
-                        </a:rPr>
-                        <a:t> Conclusion</a:t>
-                      </a:r>
-                    </a:p>
-                    <a:p>
-                      <a:pPr marL="342900" indent="-342900">
-                        <a:lnSpc>
-                          <a:spcPct val="200000"/>
-                        </a:lnSpc>
-                        <a:buFont typeface="Wingdings" panose="05000000000000000000" pitchFamily="2" charset="2"/>
-                        <a:buChar char="§"/>
-                      </a:pPr>
-                      <a:r>
-                        <a:rPr lang="en-US" sz="2000" b="0" dirty="0">
-                          <a:solidFill>
-                            <a:schemeClr val="bg1"/>
-                          </a:solidFill>
-                          <a:latin typeface="Gill Sans MT" panose="020B0502020104020203" pitchFamily="34" charset="0"/>
-                        </a:rPr>
-                        <a:t>Future</a:t>
-                      </a:r>
-                      <a:r>
-                        <a:rPr lang="en-US" sz="2000" b="0" baseline="0" dirty="0">
-                          <a:solidFill>
-                            <a:schemeClr val="bg1"/>
-                          </a:solidFill>
-                          <a:latin typeface="Gill Sans MT" panose="020B0502020104020203" pitchFamily="34" charset="0"/>
-                        </a:rPr>
-                        <a:t> works</a:t>
-                      </a:r>
-                      <a:endParaRPr lang="en-US" sz="2000" b="0" dirty="0">
-                        <a:solidFill>
-                          <a:schemeClr val="bg1"/>
-                        </a:solidFill>
-                        <a:latin typeface="Gill Sans MT" panose="020B0502020104020203" pitchFamily="34" charset="0"/>
-                      </a:endParaRPr>
-                    </a:p>
-                    <a:p>
-                      <a:pPr marL="342900" indent="-342900">
-                        <a:lnSpc>
-                          <a:spcPct val="200000"/>
-                        </a:lnSpc>
-                        <a:buFont typeface="Wingdings" panose="05000000000000000000" pitchFamily="2" charset="2"/>
-                        <a:buChar char="§"/>
-                      </a:pPr>
-                      <a:r>
-                        <a:rPr lang="en-US" sz="2000" b="0" dirty="0">
-                          <a:solidFill>
-                            <a:schemeClr val="bg1"/>
-                          </a:solidFill>
-                          <a:latin typeface="Gill Sans MT" panose="020B0502020104020203" pitchFamily="34" charset="0"/>
-                        </a:rPr>
-                        <a:t>References</a:t>
-                      </a:r>
-                    </a:p>
-                  </a:txBody>
-                  <a:tcPr>
-                    <a:lnL w="12700" cmpd="sng">
-                      <a:noFill/>
-                    </a:lnL>
-                    <a:lnR w="12700" cmpd="sng">
-                      <a:noFill/>
-                    </a:lnR>
-                    <a:lnT w="12700" cmpd="sng">
-                      <a:noFill/>
-                    </a:lnT>
-                    <a:lnB w="38100" cmpd="sng">
-                      <a:noFill/>
-                    </a:lnB>
-                    <a:lnTlToBr w="12700" cmpd="sng">
-                      <a:noFill/>
-                      <a:prstDash val="solid"/>
-                    </a:lnTlToBr>
-                    <a:lnBlToTr w="12700" cmpd="sng">
-                      <a:noFill/>
-                      <a:prstDash val="solid"/>
-                    </a:lnBlToTr>
-                    <a:noFill/>
-                  </a:tcPr>
-                </a:tc>
-                <a:extLst>
-                  <a:ext uri="{0D108BD9-81ED-4DB2-BD59-A6C34878D82A}">
-                    <a16:rowId xmlns:a16="http://schemas.microsoft.com/office/drawing/2014/main" val="2124704652"/>
-                  </a:ext>
-                </a:extLst>
-              </a:tr>
-            </a:tbl>
-          </a:graphicData>
-        </a:graphic>
-      </p:graphicFrame>
+      <p:sp>
+        <p:nvSpPr>
+          <p:cNvPr id="3" name="TextBox 2"/>
+          <p:cNvSpPr txBox="1"/>
+          <p:nvPr/>
+        </p:nvSpPr>
+        <p:spPr>
+          <a:xfrm>
+            <a:off x="914400" y="1600200"/>
+            <a:ext cx="10360152" cy="4663440"/>
+          </a:xfrm>
+          <a:prstGeom prst="rect">
+            <a:avLst/>
+          </a:prstGeom>
+          <a:noFill/>
+        </p:spPr>
+        <p:txBody>
+          <a:bodyPr wrap="square">
+            <a:spAutoFit/>
+          </a:bodyPr>
+          <a:lstStyle/>
+          <a:p>
+            <a:pPr>
+              <a:spcAft>
+                <a:spcPts val="100"/>
+              </a:spcAft>
+              <a:defRPr sz="1200" b="1" i="0"/>
+            </a:pPr>
+            <a:r>
+              <a:t>01. INTRODUCTION &amp; PROBLEM CONTEXT</a:t>
+            </a:r>
+          </a:p>
+          <a:p>
+            <a:pPr>
+              <a:spcAft>
+                <a:spcPts val="500"/>
+              </a:spcAft>
+              <a:defRPr sz="1000" b="0" i="1"/>
+            </a:pPr>
+            <a:r>
+              <a:t>     • Motivation, Problem Statement, Objectives &amp; ERQs</a:t>
+            </a:r>
+          </a:p>
+          <a:p>
+            <a:pPr>
+              <a:spcAft>
+                <a:spcPts val="100"/>
+              </a:spcAft>
+              <a:defRPr sz="1200" b="1" i="0"/>
+            </a:pPr>
+            <a:r>
+              <a:t>02. LITERATURE REVIEW &amp; RESEARCH GAPS</a:t>
+            </a:r>
+          </a:p>
+          <a:p>
+            <a:pPr>
+              <a:spcAft>
+                <a:spcPts val="500"/>
+              </a:spcAft>
+              <a:defRPr sz="1000" b="0" i="1"/>
+            </a:pPr>
+            <a:r>
+              <a:t>     • Benchmark Studies (Tsitos, Mahmud, Li) &amp; The Central Gap</a:t>
+            </a:r>
+          </a:p>
+          <a:p>
+            <a:pPr>
+              <a:spcAft>
+                <a:spcPts val="100"/>
+              </a:spcAft>
+              <a:defRPr sz="1200" b="1" i="0"/>
+            </a:pPr>
+            <a:r>
+              <a:t>03. SYSTEM ARCHITECTURE &amp; METHODOLOGY</a:t>
+            </a:r>
+          </a:p>
+          <a:p>
+            <a:pPr>
+              <a:spcAft>
+                <a:spcPts val="500"/>
+              </a:spcAft>
+              <a:defRPr sz="1000" b="0" i="1"/>
+            </a:pPr>
+            <a:r>
+              <a:t>     • Mechatronic Hardware, 19-D Feature MLP, LSTM, Nav2/SLAM</a:t>
+            </a:r>
+          </a:p>
+          <a:p>
+            <a:pPr>
+              <a:spcAft>
+                <a:spcPts val="100"/>
+              </a:spcAft>
+              <a:defRPr sz="1200" b="1" i="0"/>
+            </a:pPr>
+            <a:r>
+              <a:t>04. EXPERIMENTAL VALIDATION &amp; RESULTS</a:t>
+            </a:r>
+          </a:p>
+          <a:p>
+            <a:pPr>
+              <a:spcAft>
+                <a:spcPts val="500"/>
+              </a:spcAft>
+              <a:defRPr sz="1000" b="0" i="1"/>
+            </a:pPr>
+            <a:r>
+              <a:t>     • Latency Budget (&lt;75 ms), Confusion Matrix &amp; Locomotion Trials</a:t>
+            </a:r>
+          </a:p>
+          <a:p>
+            <a:pPr>
+              <a:spcAft>
+                <a:spcPts val="100"/>
+              </a:spcAft>
+              <a:defRPr sz="1200" b="1" i="0"/>
+            </a:pPr>
+            <a:r>
+              <a:t>05. CONCLUSION &amp; RECOMMENDATIONS</a:t>
+            </a:r>
+          </a:p>
+          <a:p>
+            <a:pPr>
+              <a:spcAft>
+                <a:spcPts val="500"/>
+              </a:spcAft>
+              <a:defRPr sz="1000" b="0" i="1"/>
+            </a:pPr>
+            <a:r>
+              <a:t>     • Summary of Contributions, ISO 15066 Compliance &amp; Demonstration</a:t>
+            </a:r>
+          </a:p>
+        </p:txBody>
+      </p:sp>
     </p:spTree>
     <p:extLst>
       <p:ext uri="{BB962C8B-B14F-4D97-AF65-F5344CB8AC3E}">
@@ -6770,36 +6420,48 @@
           <a:lstStyle/>
           <a:p>
             <a:pPr>
+              <a:spcAft>
+                <a:spcPts val="500"/>
+              </a:spcAft>
               <a:buFont typeface="Wingdings" panose="05000000000000000000" pitchFamily="2" charset="2"/>
               <a:buChar char="§"/>
-              <a:defRPr sz="1300"/>
-            </a:pPr>
-            <a:r>
-              <a:t>• High-Power Compute &amp; Cloud Latency: Offboard cloud vision introduces unpredictable latency (&gt;200 ms) and connection dropouts, violating real-time robotic safety thresholds (Tsitos et al., 2022).</a:t>
+              <a:defRPr sz="1050" b="0" i="0"/>
+            </a:pPr>
+            <a:r>
+              <a:t>• High-Power Hardware &amp; Cloud Latency: Offboard cloud vision introduces unpredictable latency (&gt;200 ms) and connection drops, violating real-time robotic safety reaction limits (Tsitos et al., 2022).</a:t>
             </a:r>
           </a:p>
           <a:p>
             <a:pPr>
-              <a:defRPr sz="1300"/>
-            </a:pPr>
-            <a:r>
-              <a:t>• Spatial Domain Shift Across Distances: Models evaluating raw anatomical pixel coordinates suffer severe classification degradation as operator distance varies (1.0m to 2.5m) due to optical perspective scaling.</a:t>
+              <a:spcAft>
+                <a:spcPts val="500"/>
+              </a:spcAft>
+              <a:defRPr sz="1050" b="0" i="0"/>
+            </a:pPr>
+            <a:r>
+              <a:t>• Spatial Distance Domain Shift: Classifiers evaluating raw pixel coordinates degrade as operator distance varies (1.0m to 2.5m) due to optical perspective scaling.</a:t>
             </a:r>
           </a:p>
           <a:p>
             <a:pPr>
-              <a:defRPr sz="1300"/>
-            </a:pPr>
-            <a:r>
-              <a:t>• Ungrounded &amp; Spatial-Blind Execution: Executing recognized gestures blindly without continuous 360° laser mapping presents acute collision hazards in populated indoor workspaces.</a:t>
+              <a:spcAft>
+                <a:spcPts val="500"/>
+              </a:spcAft>
+              <a:defRPr sz="1050" b="0" i="0"/>
+            </a:pPr>
+            <a:r>
+              <a:t>• Ungrounded Spatial Command Execution: Executing recognized gestures blindly without continuous 360° laser mapping and obstacle verification presents severe collision hazards in shared indoor workspaces.</a:t>
             </a:r>
           </a:p>
           <a:p>
             <a:pPr>
-              <a:defRPr sz="1300"/>
-            </a:pPr>
-            <a:r>
-              <a:t>• Collaborative Safety Requirements: International standards (ISO 15066:2016) mandate speed and separation monitoring, requiring guaranteed deterministic halting distances (&lt;0.45m).</a:t>
+              <a:spcAft>
+                <a:spcPts val="500"/>
+              </a:spcAft>
+              <a:defRPr sz="1050" b="0" i="0"/>
+            </a:pPr>
+            <a:r>
+              <a:t>• Collaborative Safety Compliance: International standards (ISO 15066:2016) mandate speed and separation monitoring, requiring guaranteed deterministic halting distances (&lt;0.45m).</a:t>
             </a:r>
           </a:p>
         </p:txBody>
@@ -6897,7 +6559,7 @@
           </a:xfrm>
         </p:spPr>
         <p:txBody>
-          <a:bodyPr>
+          <a:bodyPr wrap="square">
             <a:noAutofit/>
           </a:bodyPr>
           <a:lstStyle/>
@@ -6906,8 +6568,11 @@
               <a:lnSpc>
                 <a:spcPct val="170000"/>
               </a:lnSpc>
+              <a:spcAft>
+                <a:spcPts val="100"/>
+              </a:spcAft>
               <a:buNone/>
-              <a:defRPr b="1" sz="1400"/>
+              <a:defRPr sz="1200" b="1" i="0"/>
             </a:pPr>
             <a:r>
               <a:t>General Objective:</a:t>
@@ -6915,16 +6580,21 @@
           </a:p>
           <a:p>
             <a:pPr>
-              <a:defRPr sz="1200"/>
+              <a:spcAft>
+                <a:spcPts val="500"/>
+              </a:spcAft>
+              <a:defRPr sz="1000" b="0" i="0"/>
             </a:pPr>
             <a:r>
               <a:t>To design, implement and evaluate an edge-based real-time human intention recognition system integrating hand gestures and autonomous navigation using ROS 2.</a:t>
             </a:r>
-            <a:br/>
           </a:p>
           <a:p>
             <a:pPr>
-              <a:defRPr b="1" sz="1400"/>
+              <a:spcAft>
+                <a:spcPts val="100"/>
+              </a:spcAft>
+              <a:defRPr sz="1200" b="1" i="0"/>
             </a:pPr>
             <a:r>
               <a:t>Specific Objectives:</a:t>
@@ -6932,7 +6602,10 @@
           </a:p>
           <a:p>
             <a:pPr>
-              <a:defRPr sz="1100"/>
+              <a:spcAft>
+                <a:spcPts val="200"/>
+              </a:spcAft>
+              <a:defRPr sz="950" b="0" i="0"/>
             </a:pPr>
             <a:r>
               <a:t>• To design and implement an edge-optimized vision pipeline using 19 scale-invariant geometric hand features.</a:t>
@@ -6940,23 +6613,32 @@
           </a:p>
           <a:p>
             <a:pPr>
-              <a:defRPr sz="1100"/>
-            </a:pPr>
-            <a:r>
-              <a:t>• To construct and balance a custom 6,000-sample gesture dataset captured directly through the robot camera.</a:t>
+              <a:spcAft>
+                <a:spcPts val="200"/>
+              </a:spcAft>
+              <a:defRPr sz="950" b="0" i="0"/>
+            </a:pPr>
+            <a:r>
+              <a:t>• To construct and balance a custom 6,000-sample gesture dataset captured directly through the onboard camera.</a:t>
             </a:r>
           </a:p>
           <a:p>
             <a:pPr>
-              <a:defRPr sz="1100"/>
-            </a:pPr>
-            <a:r>
-              <a:t>• To develop an LSTM recurrent model for short-horizon human trajectory prediction.</a:t>
+              <a:spcAft>
+                <a:spcPts val="200"/>
+              </a:spcAft>
+              <a:defRPr sz="950" b="0" i="0"/>
+            </a:pPr>
+            <a:r>
+              <a:t>• To develop an LSTM sequential recurrent model for short-horizon human trajectory prediction.</a:t>
             </a:r>
           </a:p>
           <a:p>
             <a:pPr>
-              <a:defRPr sz="1100"/>
+              <a:spcAft>
+                <a:spcPts val="200"/>
+              </a:spcAft>
+              <a:defRPr sz="950" b="0" i="0"/>
             </a:pPr>
             <a:r>
               <a:t>• To implement a deterministic supervisory decision node (brain_node) with rolling consensus and visual servoing.</a:t>
@@ -6964,7 +6646,10 @@
           </a:p>
           <a:p>
             <a:pPr>
-              <a:defRPr sz="1100"/>
+              <a:spcAft>
+                <a:spcPts val="200"/>
+              </a:spcAft>
+              <a:defRPr sz="950" b="0" i="0"/>
             </a:pPr>
             <a:r>
               <a:t>• To configure and validate LiDAR SLAM and Nav2 autonomous navigation for collision-free trajectory execution.</a:t>
@@ -6972,129 +6657,13 @@
           </a:p>
           <a:p>
             <a:pPr>
-              <a:defRPr sz="1100"/>
+              <a:spcAft>
+                <a:spcPts val="200"/>
+              </a:spcAft>
+              <a:defRPr sz="950" b="0" i="0"/>
             </a:pPr>
             <a:r>
               <a:t>• To quantitatively evaluate latency budgets (&lt;150 ms), classification accuracy, and real-time physical throughput.</a:t>
-            </a:r>
-          </a:p>
-        </p:txBody>
-      </p:sp>
-      <p:sp>
-        <p:nvSpPr>
-          <p:cNvPr id="11" name="Rectangle 8"/>
-          <p:cNvSpPr>
-            <a:spLocks noChangeArrowheads="1"/>
-          </p:cNvSpPr>
-          <p:nvPr/>
-        </p:nvSpPr>
-        <p:spPr bwMode="auto">
-          <a:xfrm>
-            <a:off x="0" y="-323165"/>
-            <a:ext cx="393056" cy="646331"/>
-          </a:xfrm>
-          <a:prstGeom prst="rect">
-            <a:avLst/>
-          </a:prstGeom>
-          <a:noFill/>
-          <a:ln>
-            <a:noFill/>
-          </a:ln>
-          <a:effectLst/>
-          <a:extLst>
-            <a:ext uri="{909E8E84-426E-40DD-AFC4-6F175D3DCCD1}">
-              <a14:hiddenFill xmlns:a14="http://schemas.microsoft.com/office/drawing/2010/main">
-                <a:solidFill>
-                  <a:schemeClr val="accent1"/>
-                </a:solidFill>
-              </a14:hiddenFill>
-            </a:ext>
-            <a:ext uri="{91240B29-F687-4F45-9708-019B960494DF}">
-              <a14:hiddenLine xmlns:a14="http://schemas.microsoft.com/office/drawing/2010/main" w="9525">
-                <a:solidFill>
-                  <a:schemeClr val="tx1"/>
-                </a:solidFill>
-                <a:miter lim="800000"/>
-                <a:headEnd/>
-                <a:tailEnd/>
-              </a14:hiddenLine>
-            </a:ext>
-            <a:ext uri="{AF507438-7753-43E0-B8FC-AC1667EBCBE1}">
-              <a14:hiddenEffects xmlns:a14="http://schemas.microsoft.com/office/drawing/2010/main">
-                <a:effectLst>
-                  <a:outerShdw dist="35921" dir="2700000" algn="ctr" rotWithShape="0">
-                    <a:schemeClr val="bg2"/>
-                  </a:outerShdw>
-                </a:effectLst>
-              </a14:hiddenEffects>
-            </a:ext>
-          </a:extLst>
-        </p:spPr>
-        <p:txBody>
-          <a:bodyPr vert="horz" wrap="none" lIns="91440" tIns="45720" rIns="91440" bIns="45720" numCol="1" anchor="ctr" anchorCtr="0" compatLnSpc="1">
-            <a:prstTxWarp prst="textNoShape">
-              <a:avLst/>
-            </a:prstTxWarp>
-            <a:spAutoFit/>
-          </a:bodyPr>
-          <a:lstStyle/>
-          <a:p>
-            <a:pPr marL="0" marR="0" lvl="0" indent="0" algn="l" defTabSz="914400" rtl="0" eaLnBrk="0" fontAlgn="base" latinLnBrk="0" hangingPunct="0">
-              <a:lnSpc>
-                <a:spcPct val="100000"/>
-              </a:lnSpc>
-              <a:spcBef>
-                <a:spcPct val="0"/>
-              </a:spcBef>
-              <a:spcAft>
-                <a:spcPct val="0"/>
-              </a:spcAft>
-              <a:buClrTx/>
-              <a:buSzTx/>
-              <a:buFontTx/>
-              <a:buNone/>
-              <a:tabLst/>
-            </a:pPr>
-            <a:endParaRPr kumimoji="0" lang="en-US" altLang="en-US" sz="1800" b="0" i="0" u="none" strike="noStrike" cap="none" normalizeH="0" baseline="0" dirty="0">
-              <a:ln>
-                <a:noFill/>
-              </a:ln>
-              <a:solidFill>
-                <a:schemeClr val="tx1"/>
-              </a:solidFill>
-              <a:effectLst/>
-              <a:latin typeface="Arial" panose="020B0604020202020204" pitchFamily="34" charset="0"/>
-            </a:endParaRPr>
-          </a:p>
-          <a:p>
-            <a:pPr marL="0" marR="0" lvl="0" indent="0" algn="l" defTabSz="914400" rtl="0" eaLnBrk="0" fontAlgn="base" latinLnBrk="0" hangingPunct="0">
-              <a:lnSpc>
-                <a:spcPct val="100000"/>
-              </a:lnSpc>
-              <a:spcBef>
-                <a:spcPct val="0"/>
-              </a:spcBef>
-              <a:spcAft>
-                <a:spcPct val="0"/>
-              </a:spcAft>
-              <a:buClrTx/>
-              <a:buSzTx/>
-              <a:buFontTx/>
-              <a:buChar char="•"/>
-              <a:tabLst/>
-            </a:pPr>
-            <a:r>
-              <a:rPr kumimoji="0" lang="en-US" altLang="en-US" sz="1800" b="0" i="0" u="none" strike="noStrike" cap="none" normalizeH="0" baseline="0" dirty="0">
-                <a:ln>
-                  <a:noFill/>
-                </a:ln>
-                <a:solidFill>
-                  <a:schemeClr val="tx1"/>
-                </a:solidFill>
-                <a:effectLst/>
-                <a:latin typeface="Arial" panose="020B0604020202020204" pitchFamily="34" charset="0"/>
-              </a:rPr>
-              <a:t>. </a:t>
             </a:r>
           </a:p>
         </p:txBody>
@@ -7272,7 +6841,9 @@
                     <a:bodyPr/>
                     <a:lstStyle/>
                     <a:p>
-                      <a:pPr algn="l"/>
+                      <a:pPr algn="l">
+                        <a:defRPr sz="800"/>
+                      </a:pPr>
                       <a:r>
                         <a:rPr lang="en-US" sz="1600" b="0" dirty="0">
                           <a:solidFill>
@@ -7289,14 +6860,16 @@
                       </a:r>
                     </a:p>
                   </a:txBody>
-                  <a:tcPr marL="121920" marR="121920" marT="76200" marB="76200" anchor="ctr"/>
+                  <a:tcPr marL="45720" marR="45720" marT="27432" marB="27432" anchor="ctr"/>
                 </a:tc>
                 <a:tc>
                   <a:txBody>
                     <a:bodyPr/>
                     <a:lstStyle/>
                     <a:p>
-                      <a:pPr algn="l"/>
+                      <a:pPr algn="l">
+                        <a:defRPr sz="800"/>
+                      </a:pPr>
                       <a:r>
                         <a:rPr lang="en-US" sz="1600" b="0">
                           <a:solidFill>
@@ -7313,14 +6886,16 @@
                       </a:r>
                     </a:p>
                   </a:txBody>
-                  <a:tcPr marL="121920" marR="121920" marT="76200" marB="76200" anchor="ctr"/>
+                  <a:tcPr marL="45720" marR="45720" marT="27432" marB="27432" anchor="ctr"/>
                 </a:tc>
                 <a:tc>
                   <a:txBody>
                     <a:bodyPr/>
                     <a:lstStyle/>
                     <a:p>
-                      <a:pPr algn="l"/>
+                      <a:pPr algn="l">
+                        <a:defRPr sz="800"/>
+                      </a:pPr>
                       <a:r>
                         <a:rPr lang="en-US" sz="1600" b="0" dirty="0">
                           <a:solidFill>
@@ -7337,14 +6912,16 @@
                       </a:r>
                     </a:p>
                   </a:txBody>
-                  <a:tcPr marL="121920" marR="121920" marT="76200" marB="76200" anchor="ctr"/>
+                  <a:tcPr marL="45720" marR="45720" marT="27432" marB="27432" anchor="ctr"/>
                 </a:tc>
                 <a:tc>
                   <a:txBody>
                     <a:bodyPr/>
                     <a:lstStyle/>
                     <a:p>
-                      <a:pPr algn="l"/>
+                      <a:pPr algn="l">
+                        <a:defRPr sz="800"/>
+                      </a:pPr>
                       <a:r>
                         <a:rPr lang="en-US" sz="1600" b="0">
                           <a:solidFill>
@@ -7361,14 +6938,16 @@
                       </a:r>
                     </a:p>
                   </a:txBody>
-                  <a:tcPr marL="121920" marR="121920" marT="76200" marB="76200" anchor="ctr"/>
+                  <a:tcPr marL="45720" marR="45720" marT="27432" marB="27432" anchor="ctr"/>
                 </a:tc>
                 <a:tc>
                   <a:txBody>
                     <a:bodyPr/>
                     <a:lstStyle/>
                     <a:p>
-                      <a:pPr algn="l"/>
+                      <a:pPr algn="l">
+                        <a:defRPr sz="800"/>
+                      </a:pPr>
                       <a:r>
                         <a:rPr lang="en-US" sz="1600" b="0">
                           <a:solidFill>
@@ -7385,14 +6964,16 @@
                       </a:r>
                     </a:p>
                   </a:txBody>
-                  <a:tcPr marL="121920" marR="121920" marT="76200" marB="76200" anchor="ctr"/>
+                  <a:tcPr marL="45720" marR="45720" marT="27432" marB="27432" anchor="ctr"/>
                 </a:tc>
                 <a:tc>
                   <a:txBody>
                     <a:bodyPr/>
                     <a:lstStyle/>
                     <a:p>
-                      <a:pPr algn="l"/>
+                      <a:pPr algn="l">
+                        <a:defRPr sz="800"/>
+                      </a:pPr>
                       <a:r>
                         <a:rPr lang="en-US" sz="1600" b="0" dirty="0">
                           <a:solidFill>
@@ -7409,7 +6990,7 @@
                       </a:r>
                     </a:p>
                   </a:txBody>
-                  <a:tcPr marL="121920" marR="121920" marT="76200" marB="76200" anchor="ctr"/>
+                  <a:tcPr marL="45720" marR="45720" marT="27432" marB="27432" anchor="ctr"/>
                 </a:tc>
                 <a:extLst>
                   <a:ext uri="{0D108BD9-81ED-4DB2-BD59-A6C34878D82A}">
@@ -7423,7 +7004,9 @@
                     <a:bodyPr/>
                     <a:lstStyle/>
                     <a:p>
-                      <a:pPr algn="l"/>
+                      <a:pPr algn="l">
+                        <a:defRPr sz="800"/>
+                      </a:pPr>
                       <a:r>
                         <a:rPr lang="en-GH" sz="1600" b="0" dirty="0">
                           <a:solidFill>
@@ -7493,14 +7076,16 @@
                       </a:endParaRPr>
                     </a:p>
                   </a:txBody>
-                  <a:tcPr marL="121920" marR="121920" marT="76200" marB="76200" anchor="ctr"/>
+                  <a:tcPr marL="45720" marR="45720" marT="27432" marB="27432" anchor="ctr"/>
                 </a:tc>
                 <a:tc>
                   <a:txBody>
                     <a:bodyPr/>
                     <a:lstStyle/>
                     <a:p>
-                      <a:pPr algn="l"/>
+                      <a:pPr algn="l">
+                        <a:defRPr sz="800"/>
+                      </a:pPr>
                       <a:r>
                         <a:rPr lang="en-US" sz="1600" b="0" dirty="0" err="1">
                           <a:solidFill>
@@ -7542,14 +7127,16 @@
                       </a:endParaRPr>
                     </a:p>
                   </a:txBody>
-                  <a:tcPr marL="121920" marR="121920" marT="76200" marB="76200" anchor="ctr"/>
+                  <a:tcPr marL="45720" marR="45720" marT="27432" marB="27432" anchor="ctr"/>
                 </a:tc>
                 <a:tc>
                   <a:txBody>
                     <a:bodyPr/>
                     <a:lstStyle/>
                     <a:p>
-                      <a:pPr algn="l"/>
+                      <a:pPr algn="l">
+                        <a:defRPr sz="800"/>
+                      </a:pPr>
                       <a:r>
                         <a:rPr lang="en-US" sz="1600" b="0" i="0" dirty="0">
                           <a:latin typeface="Gill Sans MT" panose="020B0502020104020203" pitchFamily="34" charset="0"/>
@@ -7569,26 +7156,31 @@
                       </a:endParaRPr>
                     </a:p>
                   </a:txBody>
-                  <a:tcPr marL="121920" marR="121920" marT="76200" marB="76200" anchor="ctr"/>
+                  <a:tcPr marL="45720" marR="45720" marT="27432" marB="27432" anchor="ctr"/>
                 </a:tc>
                 <a:tc>
                   <a:txBody>
                     <a:bodyPr/>
                     <a:lstStyle/>
                     <a:p>
+                      <a:pPr>
+                        <a:defRPr sz="800"/>
+                      </a:pPr>
                       <a:r>
                         <a:t>Predict human intention in real time using a single RGB-D camera.</a:t>
                       </a:r>
                     </a:p>
                   </a:txBody>
-                  <a:tcPr marL="121920" marR="121920" marT="76200" marB="76200" anchor="ctr"/>
+                  <a:tcPr marL="45720" marR="45720" marT="27432" marB="27432" anchor="ctr"/>
                 </a:tc>
                 <a:tc>
                   <a:txBody>
                     <a:bodyPr/>
                     <a:lstStyle/>
                     <a:p>
-                      <a:pPr algn="l"/>
+                      <a:pPr algn="l">
+                        <a:defRPr sz="800"/>
+                      </a:pPr>
                       <a:r>
                         <a:rPr lang="en-US" sz="1600" b="0" dirty="0" err="1">
                           <a:latin typeface="Gill Sans MT" panose="020B0502020104020203" pitchFamily="34" charset="0"/>
@@ -7614,19 +7206,22 @@
                       </a:endParaRPr>
                     </a:p>
                   </a:txBody>
-                  <a:tcPr marL="121920" marR="121920" marT="76200" marB="76200" anchor="ctr"/>
+                  <a:tcPr marL="45720" marR="45720" marT="27432" marB="27432" anchor="ctr"/>
                 </a:tc>
                 <a:tc>
                   <a:txBody>
                     <a:bodyPr/>
                     <a:lstStyle/>
                     <a:p>
-                      <a:r>
-                        <a:t>Stationary UR3 manipulator arm without mobile base navigation or explicit touchless gesture command channel.</a:t>
+                      <a:pPr>
+                        <a:defRPr sz="800"/>
+                      </a:pPr>
+                      <a:r>
+                        <a:t>Stationary UR3 arm without mobile base navigation or explicit gesture command channel.</a:t>
                       </a:r>
                     </a:p>
                   </a:txBody>
-                  <a:tcPr marL="121920" marR="121920" marT="76200" marB="76200" anchor="ctr"/>
+                  <a:tcPr marL="45720" marR="45720" marT="27432" marB="27432" anchor="ctr"/>
                 </a:tc>
                 <a:extLst>
                   <a:ext uri="{0D108BD9-81ED-4DB2-BD59-A6C34878D82A}">
@@ -7640,7 +7235,9 @@
                     <a:bodyPr/>
                     <a:lstStyle/>
                     <a:p>
-                      <a:pPr algn="l"/>
+                      <a:pPr algn="l">
+                        <a:defRPr sz="800"/>
+                      </a:pPr>
                       <a:r>
                         <a:rPr lang="en-GH" sz="1600" b="0" dirty="0">
                           <a:solidFill>
@@ -7685,26 +7282,31 @@
                       </a:r>
                     </a:p>
                   </a:txBody>
-                  <a:tcPr marL="121920" marR="121920" marT="76200" marB="76200" anchor="ctr"/>
+                  <a:tcPr marL="45720" marR="45720" marT="27432" marB="27432" anchor="ctr"/>
                 </a:tc>
                 <a:tc>
                   <a:txBody>
                     <a:bodyPr/>
                     <a:lstStyle/>
                     <a:p>
+                      <a:pPr>
+                        <a:defRPr sz="800"/>
+                      </a:pPr>
                       <a:r>
                         <a:t>Mahmud et al.</a:t>
                       </a:r>
                     </a:p>
                   </a:txBody>
-                  <a:tcPr marL="121920" marR="121920" marT="76200" marB="76200" anchor="ctr"/>
+                  <a:tcPr marL="45720" marR="45720" marT="27432" marB="27432" anchor="ctr"/>
                 </a:tc>
                 <a:tc>
                   <a:txBody>
                     <a:bodyPr/>
                     <a:lstStyle/>
                     <a:p>
-                      <a:pPr algn="l"/>
+                      <a:pPr algn="l">
+                        <a:defRPr sz="800"/>
+                      </a:pPr>
                       <a:r>
                         <a:rPr lang="en-US" sz="1600" b="0" dirty="0">
                           <a:latin typeface="Gill Sans MT" panose="020B0502020104020203" pitchFamily="34" charset="0"/>
@@ -7724,14 +7326,16 @@
                       </a:endParaRPr>
                     </a:p>
                   </a:txBody>
-                  <a:tcPr marL="121920" marR="121920" marT="76200" marB="76200" anchor="ctr"/>
+                  <a:tcPr marL="45720" marR="45720" marT="27432" marB="27432" anchor="ctr"/>
                 </a:tc>
                 <a:tc>
                   <a:txBody>
                     <a:bodyPr/>
                     <a:lstStyle/>
                     <a:p>
-                      <a:pPr algn="l"/>
+                      <a:pPr algn="l">
+                        <a:defRPr sz="800"/>
+                      </a:pPr>
                       <a:r>
                         <a:rPr lang="en-US" sz="1600" b="0" dirty="0">
                           <a:latin typeface="Gill Sans MT" panose="020B0502020104020203" pitchFamily="34" charset="0"/>
@@ -7751,14 +7355,16 @@
                       </a:endParaRPr>
                     </a:p>
                   </a:txBody>
-                  <a:tcPr marL="121920" marR="121920" marT="76200" marB="76200" anchor="ctr"/>
+                  <a:tcPr marL="45720" marR="45720" marT="27432" marB="27432" anchor="ctr"/>
                 </a:tc>
                 <a:tc>
                   <a:txBody>
                     <a:bodyPr/>
                     <a:lstStyle/>
                     <a:p>
-                      <a:pPr algn="l"/>
+                      <a:pPr algn="l">
+                        <a:defRPr sz="800"/>
+                      </a:pPr>
                       <a:r>
                         <a:rPr lang="en-US" sz="1600" b="0" dirty="0">
                           <a:latin typeface="Gill Sans MT" panose="020B0502020104020203" pitchFamily="34" charset="0"/>
@@ -7778,19 +7384,22 @@
                       </a:endParaRPr>
                     </a:p>
                   </a:txBody>
-                  <a:tcPr marL="121920" marR="121920" marT="76200" marB="76200" anchor="ctr"/>
+                  <a:tcPr marL="45720" marR="45720" marT="27432" marB="27432" anchor="ctr"/>
                 </a:tc>
                 <a:tc>
                   <a:txBody>
                     <a:bodyPr/>
                     <a:lstStyle/>
                     <a:p>
-                      <a:r>
-                        <a:t>Restricted to proprietary high-power Kinect sensor; navigation evaluated only in simulation without physical latency or wheel slip.</a:t>
+                      <a:pPr>
+                        <a:defRPr sz="800"/>
+                      </a:pPr>
+                      <a:r>
+                        <a:t>Restricted to proprietary Kinect sensor; navigation evaluated only in simulation without physical latency or wheel slip.</a:t>
                       </a:r>
                     </a:p>
                   </a:txBody>
-                  <a:tcPr marL="121920" marR="121920" marT="76200" marB="76200" anchor="ctr"/>
+                  <a:tcPr marL="45720" marR="45720" marT="27432" marB="27432" anchor="ctr"/>
                 </a:tc>
                 <a:extLst>
                   <a:ext uri="{0D108BD9-81ED-4DB2-BD59-A6C34878D82A}">
@@ -7804,7 +7413,9 @@
                     <a:bodyPr/>
                     <a:lstStyle/>
                     <a:p>
-                      <a:pPr algn="l"/>
+                      <a:pPr algn="l">
+                        <a:defRPr sz="800"/>
+                      </a:pPr>
                       <a:r>
                         <a:rPr lang="en-GH" sz="1600" b="0" dirty="0">
                           <a:solidFill>
@@ -7840,26 +7451,31 @@
                       </a:r>
                     </a:p>
                   </a:txBody>
-                  <a:tcPr marL="121920" marR="121920" marT="76200" marB="76200" anchor="ctr"/>
+                  <a:tcPr marL="45720" marR="45720" marT="27432" marB="27432" anchor="ctr"/>
                 </a:tc>
                 <a:tc>
                   <a:txBody>
                     <a:bodyPr/>
                     <a:lstStyle/>
                     <a:p>
+                      <a:pPr>
+                        <a:defRPr sz="800"/>
+                      </a:pPr>
                       <a:r>
                         <a:t>Yang et al. / Li et al.</a:t>
                       </a:r>
                     </a:p>
                   </a:txBody>
-                  <a:tcPr marL="121920" marR="121920" marT="76200" marB="76200" anchor="ctr"/>
+                  <a:tcPr marL="45720" marR="45720" marT="27432" marB="27432" anchor="ctr"/>
                 </a:tc>
                 <a:tc>
                   <a:txBody>
                     <a:bodyPr/>
                     <a:lstStyle/>
                     <a:p>
-                      <a:pPr algn="l"/>
+                      <a:pPr algn="l">
+                        <a:defRPr sz="800"/>
+                      </a:pPr>
                       <a:r>
                         <a:rPr lang="en-US" sz="1600" b="0" dirty="0">
                           <a:latin typeface="Gill Sans MT" panose="020B0502020104020203" pitchFamily="34" charset="0"/>
@@ -7876,14 +7492,16 @@
                       </a:endParaRPr>
                     </a:p>
                   </a:txBody>
-                  <a:tcPr marL="121920" marR="121920" marT="76200" marB="76200" anchor="ctr"/>
+                  <a:tcPr marL="45720" marR="45720" marT="27432" marB="27432" anchor="ctr"/>
                 </a:tc>
                 <a:tc>
                   <a:txBody>
                     <a:bodyPr/>
                     <a:lstStyle/>
                     <a:p>
-                      <a:pPr algn="l"/>
+                      <a:pPr algn="l">
+                        <a:defRPr sz="800"/>
+                      </a:pPr>
                       <a:r>
                         <a:rPr lang="en-US" sz="1600" b="0" dirty="0">
                           <a:latin typeface="Gill Sans MT" panose="020B0502020104020203" pitchFamily="34" charset="0"/>
@@ -7900,14 +7518,16 @@
                       </a:endParaRPr>
                     </a:p>
                   </a:txBody>
-                  <a:tcPr marL="121920" marR="121920" marT="76200" marB="76200" anchor="ctr"/>
+                  <a:tcPr marL="45720" marR="45720" marT="27432" marB="27432" anchor="ctr"/>
                 </a:tc>
                 <a:tc>
                   <a:txBody>
                     <a:bodyPr/>
                     <a:lstStyle/>
                     <a:p>
-                      <a:pPr algn="l"/>
+                      <a:pPr algn="l">
+                        <a:defRPr sz="800"/>
+                      </a:pPr>
                       <a:r>
                         <a:rPr lang="en-US" sz="1600" b="0" dirty="0">
                           <a:latin typeface="Gill Sans MT" panose="020B0502020104020203" pitchFamily="34" charset="0"/>
@@ -7936,19 +7556,22 @@
                       </a:endParaRPr>
                     </a:p>
                   </a:txBody>
-                  <a:tcPr marL="121920" marR="121920" marT="76200" marB="76200" anchor="ctr"/>
+                  <a:tcPr marL="45720" marR="45720" marT="27432" marB="27432" anchor="ctr"/>
                 </a:tc>
                 <a:tc>
                   <a:txBody>
                     <a:bodyPr/>
                     <a:lstStyle/>
                     <a:p>
-                      <a:r>
-                        <a:t>Tested in simulation (Isaac Sim) for obstacle yielding; lacks touchless human supervisory gesture directives.</a:t>
+                      <a:pPr>
+                        <a:defRPr sz="800"/>
+                      </a:pPr>
+                      <a:r>
+                        <a:t>Simulation only (Isaac Sim); predicts obstacle clearance but lacks touchless human supervisory control.</a:t>
                       </a:r>
                     </a:p>
                   </a:txBody>
-                  <a:tcPr marL="121920" marR="121920" marT="76200" marB="76200" anchor="ctr"/>
+                  <a:tcPr marL="45720" marR="45720" marT="27432" marB="27432" anchor="ctr"/>
                 </a:tc>
                 <a:extLst>
                   <a:ext uri="{0D108BD9-81ED-4DB2-BD59-A6C34878D82A}">
@@ -7973,7 +7596,7 @@
 </p:sld>
 </file>
 
-<file path=ppt/slides/slide9.xml><?xml version="1.0" encoding="utf-8"?>
+<file path=ppt/slides/slide8.xml><?xml version="1.0" encoding="utf-8"?>
 <p:sld xmlns:a="http://schemas.openxmlformats.org/drawingml/2006/main" xmlns:r="http://schemas.openxmlformats.org/officeDocument/2006/relationships" xmlns:p="http://schemas.openxmlformats.org/presentationml/2006/main">
   <p:cSld>
     <p:spTree>
@@ -7992,13 +7615,7 @@
       </p:grpSpPr>
       <p:sp>
         <p:nvSpPr>
-          <p:cNvPr id="2" name="Title 1">
-            <a:extLst>
-              <a:ext uri="{FF2B5EF4-FFF2-40B4-BE49-F238E27FC236}">
-                <a16:creationId xmlns:a16="http://schemas.microsoft.com/office/drawing/2014/main" id="{5815D8E2-4F8C-64A5-14D0-AC29A3DF1480}"/>
-              </a:ext>
-            </a:extLst>
-          </p:cNvPr>
+          <p:cNvPr id="2" name="Title 1"/>
           <p:cNvSpPr>
             <a:spLocks noGrp="1"/>
           </p:cNvSpPr>
@@ -8006,151 +7623,23 @@
             <p:ph type="title"/>
           </p:nvPr>
         </p:nvSpPr>
-        <p:spPr>
-          <a:xfrm>
-            <a:off x="838200" y="365126"/>
-            <a:ext cx="10515600" cy="959822"/>
-          </a:xfrm>
-        </p:spPr>
-        <p:txBody>
-          <a:bodyPr>
-            <a:normAutofit/>
-          </a:bodyPr>
-          <a:lstStyle/>
-          <a:p>
-            <a:pPr algn="ctr"/>
-            <a:r>
-              <a:rPr lang="en-US" sz="4000" b="1" u="sng" dirty="0">
-                <a:gradFill>
-                  <a:gsLst>
-                    <a:gs pos="0">
-                      <a:srgbClr val="E30000"/>
-                    </a:gs>
-                    <a:gs pos="100000">
-                      <a:srgbClr val="760303"/>
-                    </a:gs>
-                  </a:gsLst>
-                  <a:lin scaled="0"/>
-                </a:gradFill>
-                <a:latin typeface="Gill Sans MT" panose="020B0502020104020203" pitchFamily="34" charset="0"/>
-                <a:cs typeface="Times New Roman" panose="02020603050405020304" pitchFamily="18" charset="0"/>
-              </a:rPr>
-              <a:t>SYSTEM ARCHITECTURE</a:t>
-            </a:r>
-            <a:endParaRPr lang="en-US" sz="4000" b="1" u="sng" dirty="0">
-              <a:solidFill>
-                <a:srgbClr val="C00000"/>
-              </a:solidFill>
-              <a:latin typeface="Gill Sans MT" panose="020B0502020104020203" pitchFamily="34" charset="0"/>
-            </a:endParaRPr>
-          </a:p>
-        </p:txBody>
-      </p:sp>
-      <p:sp>
-        <p:nvSpPr>
-          <p:cNvPr id="3" name="TextBox 2"/>
-          <p:cNvSpPr txBox="1"/>
-          <p:nvPr/>
-        </p:nvSpPr>
-        <p:spPr>
-          <a:xfrm>
-            <a:off x="936607" y="1347570"/>
-            <a:ext cx="4110606" cy="276999"/>
-          </a:xfrm>
-          <a:prstGeom prst="rect">
-            <a:avLst/>
-          </a:prstGeom>
-          <a:noFill/>
-        </p:spPr>
-        <p:txBody>
-          <a:bodyPr wrap="square" rtlCol="0">
-            <a:spAutoFit/>
-          </a:bodyPr>
-          <a:lstStyle/>
-          <a:p>
-            <a:r>
-              <a:t>Figure 3: Hardware Architecture and Signal Distribution</a:t>
-            </a:r>
-          </a:p>
-        </p:txBody>
-      </p:sp>
-      <p:sp>
-        <p:nvSpPr>
-          <p:cNvPr id="4" name="TextBox 3"/>
-          <p:cNvSpPr txBox="1"/>
-          <p:nvPr/>
-        </p:nvSpPr>
-        <p:spPr>
-          <a:xfrm>
-            <a:off x="6375633" y="1324948"/>
-            <a:ext cx="4672668" cy="338554"/>
-          </a:xfrm>
-          <a:prstGeom prst="rect">
-            <a:avLst/>
-          </a:prstGeom>
-          <a:noFill/>
-        </p:spPr>
-        <p:txBody>
-          <a:bodyPr wrap="square" rtlCol="0">
-            <a:spAutoFit/>
-          </a:bodyPr>
-          <a:lstStyle/>
-          <a:p>
-            <a:r>
-              <a:rPr lang="en-US" sz="1200" dirty="0">
-                <a:solidFill>
-                  <a:schemeClr val="bg1"/>
-                </a:solidFill>
-                <a:latin typeface="+mj-lt"/>
-              </a:rPr>
-              <a:t>Figure 4: System Architecture</a:t>
-            </a:r>
-            <a:r>
-              <a:rPr lang="en-US" sz="1600" b="1" dirty="0">
-                <a:solidFill>
-                  <a:schemeClr val="bg1"/>
-                </a:solidFill>
-                <a:latin typeface="Gill Sans MT" panose="020B0502020104020203" pitchFamily="34" charset="0"/>
-              </a:rPr>
-              <a:t> </a:t>
-            </a:r>
-          </a:p>
-        </p:txBody>
-      </p:sp>
-      <p:sp>
-        <p:nvSpPr>
-          <p:cNvPr id="8" name="Content Placeholder 7">
-            <a:extLst>
-              <a:ext uri="{FF2B5EF4-FFF2-40B4-BE49-F238E27FC236}">
-                <a16:creationId xmlns:a16="http://schemas.microsoft.com/office/drawing/2014/main" id="{00D439D8-3DD7-A512-4F51-A5E2EF81A7B3}"/>
-              </a:ext>
-            </a:extLst>
-          </p:cNvPr>
-          <p:cNvSpPr>
-            <a:spLocks noGrp="1"/>
-          </p:cNvSpPr>
-          <p:nvPr>
-            <p:ph idx="1"/>
-          </p:nvPr>
-        </p:nvSpPr>
         <p:spPr/>
         <p:txBody>
           <a:bodyPr/>
           <a:lstStyle/>
           <a:p>
-            <a:endParaRPr lang="en-GB" dirty="0"/>
+            <a:pPr>
+              <a:defRPr sz="2200"/>
+            </a:pPr>
+            <a:r>
+              <a:t>SYSTEM DESIGN &amp; ENGINEERING METHODOLOGY</a:t>
+            </a:r>
           </a:p>
         </p:txBody>
       </p:sp>
       <p:pic>
         <p:nvPicPr>
-          <p:cNvPr id="10" name="Picture 9">
-            <a:extLst>
-              <a:ext uri="{FF2B5EF4-FFF2-40B4-BE49-F238E27FC236}">
-                <a16:creationId xmlns:a16="http://schemas.microsoft.com/office/drawing/2014/main" id="{11D7432A-6B93-6BEF-EC0C-DACEA3FFF267}"/>
-              </a:ext>
-            </a:extLst>
-          </p:cNvPr>
+          <p:cNvPr id="3" name="Picture 2" descr="fig_accepted_methodology.png"/>
           <p:cNvPicPr>
             <a:picLocks noChangeAspect="1"/>
           </p:cNvPicPr>
@@ -8164,38 +7653,8 @@
         </p:blipFill>
         <p:spPr>
           <a:xfrm>
-            <a:off x="566929" y="1719054"/>
-            <a:ext cx="4849962" cy="4244767"/>
-          </a:xfrm>
-          <a:prstGeom prst="rect">
-            <a:avLst/>
-          </a:prstGeom>
-        </p:spPr>
-      </p:pic>
-      <p:pic>
-        <p:nvPicPr>
-          <p:cNvPr id="12" name="Picture 11">
-            <a:extLst>
-              <a:ext uri="{FF2B5EF4-FFF2-40B4-BE49-F238E27FC236}">
-                <a16:creationId xmlns:a16="http://schemas.microsoft.com/office/drawing/2014/main" id="{B68C4A33-BC46-51C1-A37B-47FF211A8322}"/>
-              </a:ext>
-            </a:extLst>
-          </p:cNvPr>
-          <p:cNvPicPr>
-            <a:picLocks noChangeAspect="1"/>
-          </p:cNvPicPr>
-          <p:nvPr/>
-        </p:nvPicPr>
-        <p:blipFill>
-          <a:blip r:embed="rId3"/>
-          <a:stretch>
-            <a:fillRect/>
-          </a:stretch>
-        </p:blipFill>
-        <p:spPr>
-          <a:xfrm>
-            <a:off x="6463127" y="1700511"/>
-            <a:ext cx="4446919" cy="4391033"/>
+            <a:off x="731520" y="1234440"/>
+            <a:ext cx="10725912" cy="5166360"/>
           </a:xfrm>
           <a:prstGeom prst="rect">
             <a:avLst/>
@@ -8205,7 +7664,7 @@
     </p:spTree>
     <p:extLst>
       <p:ext uri="{BB962C8B-B14F-4D97-AF65-F5344CB8AC3E}">
-        <p14:creationId xmlns:p14="http://schemas.microsoft.com/office/powerpoint/2010/main" val="3882807801"/>
+        <p14:creationId xmlns:p14="http://schemas.microsoft.com/office/powerpoint/2010/main" val="979758247"/>
       </p:ext>
     </p:extLst>
   </p:cSld>
